--- a/week7/WebPro_Week6_Fri_FormValidation_v3.pptx
+++ b/week7/WebPro_Week6_Fri_FormValidation_v3.pptx
@@ -4,6 +4,9 @@
   <p:sldMasterIdLst>
     <p:sldMasterId id="2147483648" r:id="rId1"/>
   </p:sldMasterIdLst>
+  <p:notesMasterIdLst>
+    <p:notesMasterId r:id="rId21"/>
+  </p:notesMasterIdLst>
   <p:sldIdLst>
     <p:sldId id="256" r:id="rId2"/>
     <p:sldId id="257" r:id="rId3"/>
@@ -25,10 +28,7 @@
     <p:sldId id="273" r:id="rId19"/>
     <p:sldId id="274" r:id="rId20"/>
   </p:sldIdLst>
-  <p:notesMasterIdLst>
-    <p:notesMasterId r:id="rId21"/>
-  </p:notesMasterIdLst>
-  <p:sldSz cx="9144000" cy="5143500"/>
+  <p:sldSz cx="9144000" cy="5143500" type="screen16x9"/>
   <p:notesSz cx="5143500" cy="9144000"/>
   <p:defaultTextStyle>
     <a:lvl1pPr marL="0" algn="l" defTabSz="914400" rtl="0" eaLnBrk="1" latinLnBrk="0" hangingPunct="1">
@@ -122,6 +122,11 @@
       </a:defRPr>
     </a:lvl9pPr>
   </p:defaultTextStyle>
+  <p:extLst>
+    <p:ext uri="{EFAFB233-063F-42B5-8137-9DF3F51BA10A}">
+      <p15:sldGuideLst xmlns:p15="http://schemas.microsoft.com/office/powerpoint/2012/main"/>
+    </p:ext>
+  </p:extLst>
 </p:presentation>
 </file>
 
@@ -147,240 +152,16 @@
           <a:chExt cx="0" cy="0"/>
         </a:xfrm>
       </p:grpSpPr>
-      <p:sp>
-        <p:nvSpPr>
-          <p:cNvPr id="2" name="Header Placeholder 1"/>
-          <p:cNvSpPr>
-            <a:spLocks noGrp="1"/>
-          </p:cNvSpPr>
-          <p:nvPr>
-            <p:ph type="hdr" sz="quarter"/>
-          </p:nvPr>
-        </p:nvSpPr>
-        <p:spPr>
-          <a:xfrm>
-            <a:off x="0" y="0"/>
-            <a:ext cx="2971800" cy="458788"/>
-          </a:xfrm>
-          <a:prstGeom prst="rect">
-            <a:avLst/>
-          </a:prstGeom>
-        </p:spPr>
-        <p:txBody>
-          <a:bodyPr vert="horz" lIns="91440" tIns="45720" rIns="91440" bIns="45720" rtlCol="0"/>
-          <a:lstStyle>
-            <a:lvl1pPr algn="l">
-              <a:defRPr sz="1200"/>
-            </a:lvl1pPr>
-          </a:lstStyle>
-          <a:p>
-            <a:endParaRPr lang="en-US"/>
-          </a:p>
-        </p:txBody>
-      </p:sp>
-      <p:sp>
-        <p:nvSpPr>
-          <p:cNvPr id="3" name="Date Placeholder 2"/>
-          <p:cNvSpPr>
-            <a:spLocks noGrp="1"/>
-          </p:cNvSpPr>
-          <p:nvPr>
-            <p:ph type="dt" idx="1"/>
-          </p:nvPr>
-        </p:nvSpPr>
-        <p:spPr>
-          <a:xfrm>
-            <a:off x="3884613" y="0"/>
-            <a:ext cx="2971800" cy="458788"/>
-          </a:xfrm>
-          <a:prstGeom prst="rect">
-            <a:avLst/>
-          </a:prstGeom>
-        </p:spPr>
-        <p:txBody>
-          <a:bodyPr vert="horz" lIns="91440" tIns="45720" rIns="91440" bIns="45720" rtlCol="0"/>
-          <a:lstStyle>
-            <a:lvl1pPr algn="r">
-              <a:defRPr sz="1200"/>
-            </a:lvl1pPr>
-          </a:lstStyle>
-          <a:p>
-            <a:fld id="{5282F153-3F37-0F45-9E97-73ACFA13230C}" type="datetimeFigureOut">
-              <a:rPr lang="en-US"/>
-              <a:t>7/23/19</a:t>
-            </a:fld>
-            <a:endParaRPr lang="en-US"/>
-          </a:p>
-        </p:txBody>
-      </p:sp>
-      <p:sp>
-        <p:nvSpPr>
-          <p:cNvPr id="4" name="Slide Image Placeholder 3"/>
-          <p:cNvSpPr>
-            <a:spLocks noGrp="1" noRot="1" noChangeAspect="1"/>
-          </p:cNvSpPr>
-          <p:nvPr>
-            <p:ph type="sldImg" idx="2"/>
-          </p:nvPr>
-        </p:nvSpPr>
-        <p:spPr>
-          <a:xfrm>
-            <a:off x="685800" y="1143000"/>
-            <a:ext cx="5486400" cy="3086100"/>
-          </a:xfrm>
-          <a:prstGeom prst="rect">
-            <a:avLst/>
-          </a:prstGeom>
-          <a:noFill/>
-          <a:ln w="12700">
-            <a:solidFill>
-              <a:prstClr val="black"/>
-            </a:solidFill>
-          </a:ln>
-        </p:spPr>
-        <p:txBody>
-          <a:bodyPr vert="horz" lIns="91440" tIns="45720" rIns="91440" bIns="45720" rtlCol="0" anchor="ctr"/>
-          <a:lstStyle/>
-          <a:p>
-            <a:endParaRPr lang="en-US"/>
-          </a:p>
-        </p:txBody>
-      </p:sp>
-      <p:sp>
-        <p:nvSpPr>
-          <p:cNvPr id="5" name="Notes Placeholder 4"/>
-          <p:cNvSpPr>
-            <a:spLocks noGrp="1"/>
-          </p:cNvSpPr>
-          <p:nvPr>
-            <p:ph type="body" sz="quarter" idx="3"/>
-          </p:nvPr>
-        </p:nvSpPr>
-        <p:spPr>
-          <a:xfrm>
-            <a:off x="685800" y="4400550"/>
-            <a:ext cx="5486400" cy="3600450"/>
-          </a:xfrm>
-          <a:prstGeom prst="rect">
-            <a:avLst/>
-          </a:prstGeom>
-        </p:spPr>
-        <p:txBody>
-          <a:bodyPr vert="horz" lIns="91440" tIns="45720" rIns="91440" bIns="45720" rtlCol="0"/>
-          <a:lstStyle/>
-          <a:p>
-            <a:pPr lvl="0"/>
-            <a:r>
-              <a:rPr lang="en-US"/>
-              <a:t>Click to edit Master text styles</a:t>
-            </a:r>
-          </a:p>
-          <a:p>
-            <a:pPr lvl="1"/>
-            <a:r>
-              <a:rPr lang="en-US"/>
-              <a:t>Second level</a:t>
-            </a:r>
-          </a:p>
-          <a:p>
-            <a:pPr lvl="2"/>
-            <a:r>
-              <a:rPr lang="en-US"/>
-              <a:t>Third level</a:t>
-            </a:r>
-          </a:p>
-          <a:p>
-            <a:pPr lvl="3"/>
-            <a:r>
-              <a:rPr lang="en-US"/>
-              <a:t>Fourth level</a:t>
-            </a:r>
-          </a:p>
-          <a:p>
-            <a:pPr lvl="4"/>
-            <a:r>
-              <a:rPr lang="en-US"/>
-              <a:t>Fifth level</a:t>
-            </a:r>
-          </a:p>
-        </p:txBody>
-      </p:sp>
-      <p:sp>
-        <p:nvSpPr>
-          <p:cNvPr id="6" name="Footer Placeholder 5"/>
-          <p:cNvSpPr>
-            <a:spLocks noGrp="1"/>
-          </p:cNvSpPr>
-          <p:nvPr>
-            <p:ph type="ftr" sz="quarter" idx="4"/>
-          </p:nvPr>
-        </p:nvSpPr>
-        <p:spPr>
-          <a:xfrm>
-            <a:off x="0" y="8685213"/>
-            <a:ext cx="2971800" cy="458787"/>
-          </a:xfrm>
-          <a:prstGeom prst="rect">
-            <a:avLst/>
-          </a:prstGeom>
-        </p:spPr>
-        <p:txBody>
-          <a:bodyPr vert="horz" lIns="91440" tIns="45720" rIns="91440" bIns="45720" rtlCol="0" anchor="b"/>
-          <a:lstStyle>
-            <a:lvl1pPr algn="l">
-              <a:defRPr sz="1200"/>
-            </a:lvl1pPr>
-          </a:lstStyle>
-          <a:p>
-            <a:endParaRPr lang="en-US"/>
-          </a:p>
-        </p:txBody>
-      </p:sp>
-      <p:sp>
-        <p:nvSpPr>
-          <p:cNvPr id="7" name="Slide Number Placeholder 6"/>
-          <p:cNvSpPr>
-            <a:spLocks noGrp="1"/>
-          </p:cNvSpPr>
-          <p:nvPr>
-            <p:ph type="sldNum" sz="quarter" idx="5"/>
-          </p:nvPr>
-        </p:nvSpPr>
-        <p:spPr>
-          <a:xfrm>
-            <a:off x="3884613" y="8685213"/>
-            <a:ext cx="2971800" cy="458787"/>
-          </a:xfrm>
-          <a:prstGeom prst="rect">
-            <a:avLst/>
-          </a:prstGeom>
-        </p:spPr>
-        <p:txBody>
-          <a:bodyPr vert="horz" lIns="91440" tIns="45720" rIns="91440" bIns="45720" rtlCol="0" anchor="b"/>
-          <a:lstStyle>
-            <a:lvl1pPr algn="r">
-              <a:defRPr sz="1200"/>
-            </a:lvl1pPr>
-          </a:lstStyle>
-          <a:p>
-            <a:fld id="{CE5E9CC1-C706-0F49-92D6-E571CC5EEA8F}" type="slidenum">
-              <a:rPr lang="en-US"/>
-              <a:t>‹#›</a:t>
-            </a:fld>
-            <a:endParaRPr lang="en-US"/>
-          </a:p>
-        </p:txBody>
-      </p:sp>
     </p:spTree>
     <p:extLst>
       <p:ext uri="{BB962C8B-B14F-4D97-AF65-F5344CB8AC3E}">
-        <p14:creationId xmlns:p14="http://schemas.microsoft.com/office/powerpoint/2010/main" val="1024086991"/>
+        <p14:creationId xmlns:p14="http://schemas.microsoft.com/office/powerpoint/2010/main" val="2343193283"/>
       </p:ext>
     </p:extLst>
   </p:cSld>
   <p:clrMap bg1="lt1" tx1="dk1" bg2="lt2" tx2="dk2" accent1="accent1" accent2="accent2" accent3="accent3" accent4="accent4" accent5="accent5" accent6="accent6" hlink="hlink" folHlink="folHlink"/>
   <p:notesStyle>
-    <a:lvl1pPr marL="0" algn="l" defTabSz="914400" rtl="0" eaLnBrk="1" latinLnBrk="0" hangingPunct="1">
+    <a:lvl1pPr marL="0" algn="l" defTabSz="914400" rtl="0" eaLnBrk="1" latinLnBrk="1" hangingPunct="1">
       <a:defRPr sz="1200" kern="1200">
         <a:solidFill>
           <a:schemeClr val="tx1"/>
@@ -390,7 +171,7 @@
         <a:cs typeface="+mn-cs"/>
       </a:defRPr>
     </a:lvl1pPr>
-    <a:lvl2pPr marL="457200" algn="l" defTabSz="914400" rtl="0" eaLnBrk="1" latinLnBrk="0" hangingPunct="1">
+    <a:lvl2pPr marL="457200" algn="l" defTabSz="914400" rtl="0" eaLnBrk="1" latinLnBrk="1" hangingPunct="1">
       <a:defRPr sz="1200" kern="1200">
         <a:solidFill>
           <a:schemeClr val="tx1"/>
@@ -400,7 +181,7 @@
         <a:cs typeface="+mn-cs"/>
       </a:defRPr>
     </a:lvl2pPr>
-    <a:lvl3pPr marL="914400" algn="l" defTabSz="914400" rtl="0" eaLnBrk="1" latinLnBrk="0" hangingPunct="1">
+    <a:lvl3pPr marL="914400" algn="l" defTabSz="914400" rtl="0" eaLnBrk="1" latinLnBrk="1" hangingPunct="1">
       <a:defRPr sz="1200" kern="1200">
         <a:solidFill>
           <a:schemeClr val="tx1"/>
@@ -410,7 +191,7 @@
         <a:cs typeface="+mn-cs"/>
       </a:defRPr>
     </a:lvl3pPr>
-    <a:lvl4pPr marL="1371600" algn="l" defTabSz="914400" rtl="0" eaLnBrk="1" latinLnBrk="0" hangingPunct="1">
+    <a:lvl4pPr marL="1371600" algn="l" defTabSz="914400" rtl="0" eaLnBrk="1" latinLnBrk="1" hangingPunct="1">
       <a:defRPr sz="1200" kern="1200">
         <a:solidFill>
           <a:schemeClr val="tx1"/>
@@ -420,7 +201,7 @@
         <a:cs typeface="+mn-cs"/>
       </a:defRPr>
     </a:lvl4pPr>
-    <a:lvl5pPr marL="1828800" algn="l" defTabSz="914400" rtl="0" eaLnBrk="1" latinLnBrk="0" hangingPunct="1">
+    <a:lvl5pPr marL="1828800" algn="l" defTabSz="914400" rtl="0" eaLnBrk="1" latinLnBrk="1" hangingPunct="1">
       <a:defRPr sz="1200" kern="1200">
         <a:solidFill>
           <a:schemeClr val="tx1"/>
@@ -430,7 +211,7 @@
         <a:cs typeface="+mn-cs"/>
       </a:defRPr>
     </a:lvl5pPr>
-    <a:lvl6pPr marL="2286000" algn="l" defTabSz="914400" rtl="0" eaLnBrk="1" latinLnBrk="0" hangingPunct="1">
+    <a:lvl6pPr marL="2286000" algn="l" defTabSz="914400" rtl="0" eaLnBrk="1" latinLnBrk="1" hangingPunct="1">
       <a:defRPr sz="1200" kern="1200">
         <a:solidFill>
           <a:schemeClr val="tx1"/>
@@ -440,7 +221,7 @@
         <a:cs typeface="+mn-cs"/>
       </a:defRPr>
     </a:lvl6pPr>
-    <a:lvl7pPr marL="2743200" algn="l" defTabSz="914400" rtl="0" eaLnBrk="1" latinLnBrk="0" hangingPunct="1">
+    <a:lvl7pPr marL="2743200" algn="l" defTabSz="914400" rtl="0" eaLnBrk="1" latinLnBrk="1" hangingPunct="1">
       <a:defRPr sz="1200" kern="1200">
         <a:solidFill>
           <a:schemeClr val="tx1"/>
@@ -450,7 +231,7 @@
         <a:cs typeface="+mn-cs"/>
       </a:defRPr>
     </a:lvl7pPr>
-    <a:lvl8pPr marL="3200400" algn="l" defTabSz="914400" rtl="0" eaLnBrk="1" latinLnBrk="0" hangingPunct="1">
+    <a:lvl8pPr marL="3200400" algn="l" defTabSz="914400" rtl="0" eaLnBrk="1" latinLnBrk="1" hangingPunct="1">
       <a:defRPr sz="1200" kern="1200">
         <a:solidFill>
           <a:schemeClr val="tx1"/>
@@ -460,7 +241,7 @@
         <a:cs typeface="+mn-cs"/>
       </a:defRPr>
     </a:lvl8pPr>
-    <a:lvl9pPr marL="3657600" algn="l" defTabSz="914400" rtl="0" eaLnBrk="1" latinLnBrk="0" hangingPunct="1">
+    <a:lvl9pPr marL="3657600" algn="l" defTabSz="914400" rtl="0" eaLnBrk="1" latinLnBrk="1" hangingPunct="1">
       <a:defRPr sz="1200" kern="1200">
         <a:solidFill>
           <a:schemeClr val="tx1"/>
@@ -522,7 +303,6 @@
               <a:rPr lang="en-US" dirty="0"/>
               <a:t>Today we move from HTML5 browser validation to custom JavaScript validation. We'll see why JS gives us more control — better UX, custom messages, real-time feedback, and ARIA accessibility.</a:t>
             </a:r>
-            <a:endParaRPr lang="en-US" dirty="0"/>
           </a:p>
         </p:txBody>
       </p:sp>
@@ -606,10 +386,6 @@
           <a:bodyPr/>
           <a:lstStyle/>
           <a:p>
-            <a:r>
-              <a:rPr lang="en-US" dirty="0"/>
-              <a:t/>
-            </a:r>
             <a:endParaRPr lang="en-US" dirty="0"/>
           </a:p>
         </p:txBody>
@@ -694,10 +470,6 @@
           <a:bodyPr/>
           <a:lstStyle/>
           <a:p>
-            <a:r>
-              <a:rPr lang="en-US" dirty="0"/>
-              <a:t/>
-            </a:r>
             <a:endParaRPr lang="en-US" dirty="0"/>
           </a:p>
         </p:txBody>
@@ -786,7 +558,6 @@
               <a:rPr lang="en-US" dirty="0"/>
               <a:t>setCustomValidity() is the bridge between your JS logic and the browser's validity API. When you pass a non-empty string, the field becomes invalid — `checkValidity()` returns false for it, and the submit button disabled trick works. Pass an empty string to clear the error. This is the ONLY way to make custom comparisons (like password matching) work with the HTML5 validity system.</a:t>
             </a:r>
-            <a:endParaRPr lang="en-US" dirty="0"/>
           </a:p>
         </p:txBody>
       </p:sp>
@@ -870,10 +641,6 @@
           <a:bodyPr/>
           <a:lstStyle/>
           <a:p>
-            <a:r>
-              <a:rPr lang="en-US" dirty="0"/>
-              <a:t/>
-            </a:r>
             <a:endParaRPr lang="en-US" dirty="0"/>
           </a:p>
         </p:txBody>
@@ -958,10 +725,6 @@
           <a:bodyPr/>
           <a:lstStyle/>
           <a:p>
-            <a:r>
-              <a:rPr lang="en-US" dirty="0"/>
-              <a:t/>
-            </a:r>
             <a:endParaRPr lang="en-US" dirty="0"/>
           </a:p>
         </p:txBody>
@@ -1050,7 +813,6 @@
               <a:rPr lang="en-US" dirty="0"/>
               <a:t>Disabling the submit button is a great UX pattern — users see at a glance that the form isn't complete yet. `form.checkValidity()` returns true only when every field passes its constraints (required filled, pattern matched, setCustomValidity cleared). The button turns blue as soon as all fields are valid. Important: always ALSO validate on submit — the disabled state can be bypassed in DevTools.</a:t>
             </a:r>
-            <a:endParaRPr lang="en-US" dirty="0"/>
           </a:p>
         </p:txBody>
       </p:sp>
@@ -1134,10 +896,6 @@
           <a:bodyPr/>
           <a:lstStyle/>
           <a:p>
-            <a:r>
-              <a:rPr lang="en-US" dirty="0"/>
-              <a:t/>
-            </a:r>
             <a:endParaRPr lang="en-US" dirty="0"/>
           </a:p>
         </p:txBody>
@@ -1222,10 +980,6 @@
           <a:bodyPr/>
           <a:lstStyle/>
           <a:p>
-            <a:r>
-              <a:rPr lang="en-US" dirty="0"/>
-              <a:t/>
-            </a:r>
             <a:endParaRPr lang="en-US" dirty="0"/>
           </a:p>
         </p:txBody>
@@ -1314,7 +1068,6 @@
               <a:rPr lang="en-US" dirty="0"/>
               <a:t>This is the complete pattern you'll use for every project that needs a validated form. Three parts: helper functions (markValid/markInvalid), per-field validator functions, and event listener setup. Keep each field's validator in its own function — it makes the code easy to reuse and test. The real-time `input` listener calls the same function the submit handler uses.</a:t>
             </a:r>
-            <a:endParaRPr lang="en-US" dirty="0"/>
           </a:p>
         </p:txBody>
       </p:sp>
@@ -1402,7 +1155,6 @@
               <a:rPr lang="en-US" dirty="0"/>
               <a:t>Friday homework builds directly on Monday's hw.html file. Add novalidate to the form, write a validateField() function for each input, hook them up to the input event, add password confirmation with setCustomValidity(), and add ARIA attributes. The bonus is disabling Submit until the form is valid.</a:t>
             </a:r>
-            <a:endParaRPr lang="en-US" dirty="0"/>
           </a:p>
         </p:txBody>
       </p:sp>
@@ -1490,7 +1242,6 @@
               <a:rPr lang="en-US" dirty="0"/>
               <a:t>HTML5 validation works, but browser error tooltips are browser-specific, can't be styled, and only appear on submit. JS lets us: (1) show errors as the user types, (2) write custom messages in Korean or English, (3) add ARIA so screen readers announce errors.</a:t>
             </a:r>
-            <a:endParaRPr lang="en-US" dirty="0"/>
           </a:p>
         </p:txBody>
       </p:sp>
@@ -1578,7 +1329,6 @@
               <a:rPr lang="en-US" dirty="0"/>
               <a:t>Adding `novalidate` to the form tells the browser: don't show your built-in error bubbles. We are taking responsibility for validation in JavaScript. Without it, both the browser AND your JS would show errors — double messages.</a:t>
             </a:r>
-            <a:endParaRPr lang="en-US" dirty="0"/>
           </a:p>
         </p:txBody>
       </p:sp>
@@ -1666,7 +1416,6 @@
               <a:rPr lang="en-US" dirty="0"/>
               <a:t>event.preventDefault() is the most important line. Without it, the browser would send the form and reload the page — and your validation code would never run. preventDefault() pauses the submit so your JS decides what happens next.</a:t>
             </a:r>
-            <a:endParaRPr lang="en-US" dirty="0"/>
           </a:p>
         </p:txBody>
       </p:sp>
@@ -1754,7 +1503,6 @@
               <a:rPr lang="en-US" dirty="0"/>
               <a:t>The `input` event fires every time the field value changes — every keystroke, paste, delete. This is what enables real-time feedback. Compare: with submit-only validation, a user who fills 5 fields then clicks Submit learns the first field was wrong — frustrating. With input-event validation, they see the green checkmark as they finish each field.</a:t>
             </a:r>
-            <a:endParaRPr lang="en-US" dirty="0"/>
           </a:p>
         </p:txBody>
       </p:sp>
@@ -1842,7 +1590,6 @@
               <a:rPr lang="en-US" dirty="0"/>
               <a:t>The `validity` object has properties for every HTML5 constraint: `valueMissing` (required + empty), `typeMismatch` (email/url format wrong), `tooShort` (minlength not met), `patternMismatch` (pattern regex fails). For custom patterns not in HTML5 (like a phone format), use regex `.test()`. Both approaches work — mix them.</a:t>
             </a:r>
-            <a:endParaRPr lang="en-US" dirty="0"/>
           </a:p>
         </p:txBody>
       </p:sp>
@@ -1926,10 +1673,6 @@
           <a:bodyPr/>
           <a:lstStyle/>
           <a:p>
-            <a:r>
-              <a:rPr lang="en-US" dirty="0"/>
-              <a:t/>
-            </a:r>
             <a:endParaRPr lang="en-US" dirty="0"/>
           </a:p>
         </p:txBody>
@@ -2014,10 +1757,6 @@
           <a:bodyPr/>
           <a:lstStyle/>
           <a:p>
-            <a:r>
-              <a:rPr lang="en-US" dirty="0"/>
-              <a:t/>
-            </a:r>
             <a:endParaRPr lang="en-US" dirty="0"/>
           </a:p>
         </p:txBody>
@@ -2106,7 +1845,6 @@
               <a:rPr lang="en-US" dirty="0"/>
               <a:t>Three ARIA attributes make validation accessible: (1) `aria-describedby` links the input to its error span — screen readers read the error when the user focuses the field. (2) `aria-invalid='true'` tells assistive tech this field has a problem. (3) `role='alert'` on the span makes the screen reader announce changes immediately. Without these, blind users get no validation feedback at all.</a:t>
             </a:r>
-            <a:endParaRPr lang="en-US" dirty="0"/>
           </a:p>
         </p:txBody>
       </p:sp>
@@ -2179,6 +1917,11 @@
 <file path=ppt/slideMasters/slideMaster1.xml><?xml version="1.0" encoding="utf-8"?>
 <p:sldMaster xmlns:a="http://schemas.openxmlformats.org/drawingml/2006/main" xmlns:r="http://schemas.openxmlformats.org/officeDocument/2006/relationships" xmlns:p="http://schemas.openxmlformats.org/presentationml/2006/main">
   <p:cSld>
+    <p:bg>
+      <p:bgRef idx="1001">
+        <a:schemeClr val="bg1"/>
+      </p:bgRef>
+    </p:bg>
     <p:spTree>
       <p:nvGrpSpPr>
         <p:cNvPr id="1" name=""/>
@@ -2461,6 +2204,7 @@
         <a:solidFill>
           <a:srgbClr val="0D1321"/>
         </a:solidFill>
+        <a:effectLst/>
       </p:bgPr>
     </p:bg>
     <p:spTree>
@@ -2498,7 +2242,7 @@
           <a:bodyPr wrap="square" rtlCol="0" anchor="ctr"/>
           <a:lstStyle/>
           <a:p>
-            <a:pPr algn="ctr" indent="0" marL="0">
+            <a:pPr marL="0" indent="0" algn="ctr">
               <a:buNone/>
             </a:pPr>
             <a:r>
@@ -2537,11 +2281,11 @@
           <a:bodyPr wrap="square" rtlCol="0" anchor="ctr"/>
           <a:lstStyle/>
           <a:p>
-            <a:pPr algn="ctr" indent="0" marL="0">
-              <a:buNone/>
-            </a:pPr>
-            <a:r>
-              <a:rPr lang="en-US" sz="1800" dirty="0">
+            <a:pPr marL="0" indent="0" algn="ctr">
+              <a:buNone/>
+            </a:pPr>
+            <a:r>
+              <a:rPr lang="en-US" sz="1800">
                 <a:solidFill>
                   <a:srgbClr val="FFFFFF"/>
                 </a:solidFill>
@@ -2549,7 +2293,18 @@
                 <a:ea typeface="Calibri" pitchFamily="34" charset="-122"/>
                 <a:cs typeface="Calibri" pitchFamily="34" charset="-120"/>
               </a:rPr>
-              <a:t>Week 6 — Friday | K0126002 Web Programming</a:t>
+              <a:t> </a:t>
+            </a:r>
+            <a:r>
+              <a:rPr lang="en-US" sz="1800" dirty="0">
+                <a:solidFill>
+                  <a:srgbClr val="FFFFFF"/>
+                </a:solidFill>
+                <a:latin typeface="Calibri" pitchFamily="34" charset="0"/>
+                <a:ea typeface="Calibri" pitchFamily="34" charset="-122"/>
+                <a:cs typeface="Calibri" pitchFamily="34" charset="-120"/>
+              </a:rPr>
+              <a:t>K0126002 Web Programming</a:t>
             </a:r>
             <a:endParaRPr lang="en-US" sz="1800" dirty="0"/>
           </a:p>
@@ -2576,7 +2331,7 @@
           <a:bodyPr wrap="square" rtlCol="0" anchor="ctr"/>
           <a:lstStyle/>
           <a:p>
-            <a:pPr algn="ctr" indent="0" marL="0">
+            <a:pPr marL="0" indent="0" algn="ctr">
               <a:buNone/>
             </a:pPr>
             <a:r>
@@ -2610,6 +2365,7 @@
         <a:solidFill>
           <a:srgbClr val="0D1321"/>
         </a:solidFill>
+        <a:effectLst/>
       </p:bgPr>
     </p:bg>
     <p:spTree>
@@ -2647,7 +2403,7 @@
           <a:bodyPr wrap="square" rtlCol="0" anchor="ctr"/>
           <a:lstStyle/>
           <a:p>
-            <a:pPr algn="ctr" indent="0" marL="0">
+            <a:pPr marL="0" indent="0" algn="ctr">
               <a:buNone/>
             </a:pPr>
             <a:r>
@@ -2686,7 +2442,7 @@
           <a:bodyPr wrap="square" rtlCol="0" anchor="ctr"/>
           <a:lstStyle/>
           <a:p>
-            <a:pPr algn="ctr" indent="0" marL="0">
+            <a:pPr marL="0" indent="0" algn="ctr">
               <a:buNone/>
             </a:pPr>
             <a:r>
@@ -2750,7 +2506,7 @@
           <a:bodyPr wrap="square" lIns="0" tIns="0" rIns="0" bIns="0" rtlCol="0" anchor="ctr"/>
           <a:lstStyle/>
           <a:p>
-            <a:pPr indent="0" marL="0">
+            <a:pPr marL="0" indent="0">
               <a:buNone/>
             </a:pPr>
             <a:r>
@@ -2814,7 +2570,7 @@
           <a:bodyPr wrap="square" lIns="0" tIns="0" rIns="0" bIns="0" rtlCol="0" anchor="ctr"/>
           <a:lstStyle/>
           <a:p>
-            <a:pPr indent="0" marL="0">
+            <a:pPr marL="0" indent="0">
               <a:buNone/>
             </a:pPr>
             <a:r>
@@ -2878,7 +2634,7 @@
           <a:bodyPr wrap="square" lIns="0" tIns="0" rIns="0" bIns="0" rtlCol="0" anchor="ctr"/>
           <a:lstStyle/>
           <a:p>
-            <a:pPr indent="0" marL="0">
+            <a:pPr marL="0" indent="0">
               <a:buNone/>
             </a:pPr>
             <a:r>
@@ -2942,7 +2698,7 @@
           <a:bodyPr wrap="square" lIns="0" tIns="0" rIns="0" bIns="0" rtlCol="0" anchor="ctr"/>
           <a:lstStyle/>
           <a:p>
-            <a:pPr indent="0" marL="0">
+            <a:pPr marL="0" indent="0">
               <a:buNone/>
             </a:pPr>
             <a:r>
@@ -2981,7 +2737,7 @@
           <a:bodyPr wrap="square" rtlCol="0" anchor="ctr"/>
           <a:lstStyle/>
           <a:p>
-            <a:pPr algn="ctr" indent="0" marL="0">
+            <a:pPr marL="0" indent="0" algn="ctr">
               <a:buNone/>
             </a:pPr>
             <a:r>
@@ -3015,6 +2771,7 @@
         <a:solidFill>
           <a:srgbClr val="0D1321"/>
         </a:solidFill>
+        <a:effectLst/>
       </p:bgPr>
     </p:bg>
     <p:spTree>
@@ -3052,7 +2809,7 @@
           <a:bodyPr wrap="square" rtlCol="0" anchor="ctr"/>
           <a:lstStyle/>
           <a:p>
-            <a:pPr algn="ctr" indent="0" marL="0">
+            <a:pPr marL="0" indent="0" algn="ctr">
               <a:buNone/>
             </a:pPr>
             <a:r>
@@ -3091,7 +2848,7 @@
           <a:bodyPr wrap="square" rtlCol="0" anchor="ctr"/>
           <a:lstStyle/>
           <a:p>
-            <a:pPr algn="ctr" indent="0" marL="0">
+            <a:pPr marL="0" indent="0" algn="ctr">
               <a:buNone/>
             </a:pPr>
             <a:r>
@@ -3155,7 +2912,7 @@
           <a:bodyPr wrap="square" lIns="0" tIns="0" rIns="0" bIns="0" rtlCol="0" anchor="ctr"/>
           <a:lstStyle/>
           <a:p>
-            <a:pPr indent="0" marL="0">
+            <a:pPr marL="0" indent="0">
               <a:buNone/>
             </a:pPr>
             <a:r>
@@ -3219,7 +2976,7 @@
           <a:bodyPr wrap="square" lIns="0" tIns="0" rIns="0" bIns="0" rtlCol="0" anchor="ctr"/>
           <a:lstStyle/>
           <a:p>
-            <a:pPr indent="0" marL="0">
+            <a:pPr marL="0" indent="0">
               <a:buNone/>
             </a:pPr>
             <a:r>
@@ -3283,7 +3040,7 @@
           <a:bodyPr wrap="square" lIns="0" tIns="0" rIns="0" bIns="0" rtlCol="0" anchor="ctr"/>
           <a:lstStyle/>
           <a:p>
-            <a:pPr indent="0" marL="0">
+            <a:pPr marL="0" indent="0">
               <a:buNone/>
             </a:pPr>
             <a:r>
@@ -3347,7 +3104,7 @@
           <a:bodyPr wrap="square" lIns="0" tIns="0" rIns="0" bIns="0" rtlCol="0" anchor="ctr"/>
           <a:lstStyle/>
           <a:p>
-            <a:pPr indent="0" marL="0">
+            <a:pPr marL="0" indent="0">
               <a:buNone/>
             </a:pPr>
             <a:r>
@@ -3406,7 +3163,7 @@
           <a:bodyPr wrap="square" lIns="0" tIns="0" rIns="0" bIns="0" rtlCol="0" anchor="t"/>
           <a:lstStyle/>
           <a:p>
-            <a:pPr indent="0" marL="0">
+            <a:pPr marL="0" indent="0">
               <a:buNone/>
             </a:pPr>
             <a:r>
@@ -3440,6 +3197,7 @@
         <a:solidFill>
           <a:srgbClr val="1A2540"/>
         </a:solidFill>
+        <a:effectLst/>
       </p:bgPr>
     </p:bg>
     <p:spTree>
@@ -3477,7 +3235,7 @@
           <a:bodyPr wrap="square" rtlCol="0" anchor="ctr"/>
           <a:lstStyle/>
           <a:p>
-            <a:pPr indent="0" marL="0">
+            <a:pPr marL="0" indent="0">
               <a:buNone/>
             </a:pPr>
             <a:r>
@@ -3516,7 +3274,7 @@
           <a:bodyPr wrap="square" lIns="0" tIns="0" rIns="0" bIns="0" rtlCol="0" anchor="ctr"/>
           <a:lstStyle/>
           <a:p>
-            <a:pPr indent="0" marL="0">
+            <a:pPr marL="0" indent="0">
               <a:buNone/>
             </a:pPr>
             <a:r>
@@ -3575,7 +3333,7 @@
           <a:bodyPr wrap="square" lIns="0" tIns="0" rIns="0" bIns="0" rtlCol="0" anchor="t"/>
           <a:lstStyle/>
           <a:p>
-            <a:pPr indent="0" marL="0">
+            <a:pPr marL="0" indent="0">
               <a:buNone/>
             </a:pPr>
             <a:r>
@@ -3592,7 +3350,7 @@
             <a:endParaRPr lang="en-US" sz="850" dirty="0"/>
           </a:p>
           <a:p>
-            <a:pPr indent="0" marL="0">
+            <a:pPr marL="0" indent="0">
               <a:buNone/>
             </a:pPr>
             <a:r>
@@ -3609,7 +3367,7 @@
             <a:endParaRPr lang="en-US" sz="850" dirty="0"/>
           </a:p>
           <a:p>
-            <a:pPr indent="0" marL="0">
+            <a:pPr marL="0" indent="0">
               <a:buNone/>
             </a:pPr>
             <a:r>
@@ -3626,7 +3384,7 @@
             <a:endParaRPr lang="en-US" sz="850" dirty="0"/>
           </a:p>
           <a:p>
-            <a:pPr indent="0" marL="0">
+            <a:pPr marL="0" indent="0">
               <a:buNone/>
             </a:pPr>
             <a:r>
@@ -3643,7 +3401,7 @@
             <a:endParaRPr lang="en-US" sz="850" dirty="0"/>
           </a:p>
           <a:p>
-            <a:pPr indent="0" marL="0">
+            <a:pPr marL="0" indent="0">
               <a:buNone/>
             </a:pPr>
             <a:r>
@@ -3682,7 +3440,7 @@
           <a:bodyPr wrap="square" lIns="0" tIns="0" rIns="0" bIns="0" rtlCol="0" anchor="ctr"/>
           <a:lstStyle/>
           <a:p>
-            <a:pPr indent="0" marL="0">
+            <a:pPr marL="0" indent="0">
               <a:buNone/>
             </a:pPr>
             <a:r>
@@ -3741,7 +3499,7 @@
           <a:bodyPr wrap="square" lIns="0" tIns="0" rIns="0" bIns="0" rtlCol="0" anchor="t"/>
           <a:lstStyle/>
           <a:p>
-            <a:pPr indent="0" marL="0">
+            <a:pPr marL="0" indent="0">
               <a:buNone/>
             </a:pPr>
             <a:r>
@@ -3758,7 +3516,7 @@
             <a:endParaRPr lang="en-US" sz="850" dirty="0"/>
           </a:p>
           <a:p>
-            <a:pPr indent="0" marL="0">
+            <a:pPr marL="0" indent="0">
               <a:buNone/>
             </a:pPr>
             <a:r>
@@ -3775,13 +3533,13 @@
             <a:endParaRPr lang="en-US" sz="850" dirty="0"/>
           </a:p>
           <a:p>
-            <a:pPr indent="0" marL="0">
-              <a:buNone/>
-            </a:pPr>
-            <a:endParaRPr lang="en-US" sz="850" dirty="0"/>
-          </a:p>
-          <a:p>
-            <a:pPr indent="0" marL="0">
+            <a:pPr marL="0" indent="0">
+              <a:buNone/>
+            </a:pPr>
+            <a:endParaRPr lang="en-US" sz="850" dirty="0"/>
+          </a:p>
+          <a:p>
+            <a:pPr marL="0" indent="0">
               <a:buNone/>
             </a:pPr>
             <a:r>
@@ -3798,7 +3556,7 @@
             <a:endParaRPr lang="en-US" sz="850" dirty="0"/>
           </a:p>
           <a:p>
-            <a:pPr indent="0" marL="0">
+            <a:pPr marL="0" indent="0">
               <a:buNone/>
             </a:pPr>
             <a:r>
@@ -3815,7 +3573,7 @@
             <a:endParaRPr lang="en-US" sz="850" dirty="0"/>
           </a:p>
           <a:p>
-            <a:pPr indent="0" marL="0">
+            <a:pPr marL="0" indent="0">
               <a:buNone/>
             </a:pPr>
             <a:r>
@@ -3832,7 +3590,7 @@
             <a:endParaRPr lang="en-US" sz="850" dirty="0"/>
           </a:p>
           <a:p>
-            <a:pPr indent="0" marL="0">
+            <a:pPr marL="0" indent="0">
               <a:buNone/>
             </a:pPr>
             <a:r>
@@ -3849,7 +3607,7 @@
             <a:endParaRPr lang="en-US" sz="850" dirty="0"/>
           </a:p>
           <a:p>
-            <a:pPr indent="0" marL="0">
+            <a:pPr marL="0" indent="0">
               <a:buNone/>
             </a:pPr>
             <a:r>
@@ -3866,7 +3624,7 @@
             <a:endParaRPr lang="en-US" sz="850" dirty="0"/>
           </a:p>
           <a:p>
-            <a:pPr indent="0" marL="0">
+            <a:pPr marL="0" indent="0">
               <a:buNone/>
             </a:pPr>
             <a:r>
@@ -3883,7 +3641,7 @@
             <a:endParaRPr lang="en-US" sz="850" dirty="0"/>
           </a:p>
           <a:p>
-            <a:pPr indent="0" marL="0">
+            <a:pPr marL="0" indent="0">
               <a:buNone/>
             </a:pPr>
             <a:r>
@@ -3900,7 +3658,7 @@
             <a:endParaRPr lang="en-US" sz="850" dirty="0"/>
           </a:p>
           <a:p>
-            <a:pPr indent="0" marL="0">
+            <a:pPr marL="0" indent="0">
               <a:buNone/>
             </a:pPr>
             <a:r>
@@ -3917,7 +3675,7 @@
             <a:endParaRPr lang="en-US" sz="850" dirty="0"/>
           </a:p>
           <a:p>
-            <a:pPr indent="0" marL="0">
+            <a:pPr marL="0" indent="0">
               <a:buNone/>
             </a:pPr>
             <a:r>
@@ -3934,7 +3692,7 @@
             <a:endParaRPr lang="en-US" sz="850" dirty="0"/>
           </a:p>
           <a:p>
-            <a:pPr indent="0" marL="0">
+            <a:pPr marL="0" indent="0">
               <a:buNone/>
             </a:pPr>
             <a:r>
@@ -3993,7 +3751,7 @@
           <a:bodyPr wrap="square" lIns="0" tIns="0" rIns="0" bIns="0" rtlCol="0" anchor="t"/>
           <a:lstStyle/>
           <a:p>
-            <a:pPr indent="0" marL="0">
+            <a:pPr marL="0" indent="0">
               <a:buNone/>
             </a:pPr>
             <a:r>
@@ -4008,9 +3766,6 @@
               <a:t>Why setCustomValidity()?
 </a:t>
             </a:r>
-            <a:pPr indent="0" marL="0">
-              <a:buNone/>
-            </a:pPr>
             <a:r>
               <a:rPr lang="en-US" sz="1100" dirty="0">
                 <a:solidFill>
@@ -4023,9 +3778,6 @@
               <a:t>It bridges your JS logic and the browser's validity API.
 </a:t>
             </a:r>
-            <a:pPr indent="0" marL="0">
-              <a:buNone/>
-            </a:pPr>
             <a:r>
               <a:rPr lang="en-US" sz="1100" b="1" dirty="0">
                 <a:solidFill>
@@ -4037,9 +3789,6 @@
               </a:rPr>
               <a:t>Non-empty string</a:t>
             </a:r>
-            <a:pPr indent="0" marL="0">
-              <a:buNone/>
-            </a:pPr>
             <a:r>
               <a:rPr lang="en-US" sz="1100" dirty="0">
                 <a:solidFill>
@@ -4052,9 +3801,6 @@
               <a:t> → field is invalid, checkValidity() = false
 </a:t>
             </a:r>
-            <a:pPr indent="0" marL="0">
-              <a:buNone/>
-            </a:pPr>
             <a:r>
               <a:rPr lang="en-US" sz="1100" b="1" dirty="0">
                 <a:solidFill>
@@ -4066,9 +3812,6 @@
               </a:rPr>
               <a:t>Empty string</a:t>
             </a:r>
-            <a:pPr indent="0" marL="0">
-              <a:buNone/>
-            </a:pPr>
             <a:r>
               <a:rPr lang="en-US" sz="1100" dirty="0">
                 <a:solidFill>
@@ -4105,7 +3848,7 @@
           <a:bodyPr wrap="square" rtlCol="0" anchor="ctr"/>
           <a:lstStyle/>
           <a:p>
-            <a:pPr algn="ctr" indent="0" marL="0">
+            <a:pPr marL="0" indent="0" algn="ctr">
               <a:buNone/>
             </a:pPr>
             <a:r>
@@ -4139,6 +3882,7 @@
         <a:solidFill>
           <a:srgbClr val="0D1321"/>
         </a:solidFill>
+        <a:effectLst/>
       </p:bgPr>
     </p:bg>
     <p:spTree>
@@ -4176,7 +3920,7 @@
           <a:bodyPr wrap="square" rtlCol="0" anchor="ctr"/>
           <a:lstStyle/>
           <a:p>
-            <a:pPr algn="ctr" indent="0" marL="0">
+            <a:pPr marL="0" indent="0" algn="ctr">
               <a:buNone/>
             </a:pPr>
             <a:r>
@@ -4215,7 +3959,7 @@
           <a:bodyPr wrap="square" rtlCol="0" anchor="ctr"/>
           <a:lstStyle/>
           <a:p>
-            <a:pPr algn="ctr" indent="0" marL="0">
+            <a:pPr marL="0" indent="0" algn="ctr">
               <a:buNone/>
             </a:pPr>
             <a:r>
@@ -4279,7 +4023,7 @@
           <a:bodyPr wrap="square" lIns="0" tIns="0" rIns="0" bIns="0" rtlCol="0" anchor="ctr"/>
           <a:lstStyle/>
           <a:p>
-            <a:pPr indent="0" marL="0">
+            <a:pPr marL="0" indent="0">
               <a:buNone/>
             </a:pPr>
             <a:r>
@@ -4343,7 +4087,7 @@
           <a:bodyPr wrap="square" lIns="0" tIns="0" rIns="0" bIns="0" rtlCol="0" anchor="ctr"/>
           <a:lstStyle/>
           <a:p>
-            <a:pPr indent="0" marL="0">
+            <a:pPr marL="0" indent="0">
               <a:buNone/>
             </a:pPr>
             <a:r>
@@ -4407,7 +4151,7 @@
           <a:bodyPr wrap="square" lIns="0" tIns="0" rIns="0" bIns="0" rtlCol="0" anchor="ctr"/>
           <a:lstStyle/>
           <a:p>
-            <a:pPr indent="0" marL="0">
+            <a:pPr marL="0" indent="0">
               <a:buNone/>
             </a:pPr>
             <a:r>
@@ -4471,7 +4215,7 @@
           <a:bodyPr wrap="square" lIns="0" tIns="0" rIns="0" bIns="0" rtlCol="0" anchor="ctr"/>
           <a:lstStyle/>
           <a:p>
-            <a:pPr indent="0" marL="0">
+            <a:pPr marL="0" indent="0">
               <a:buNone/>
             </a:pPr>
             <a:r>
@@ -4510,7 +4254,7 @@
           <a:bodyPr wrap="square" rtlCol="0" anchor="ctr"/>
           <a:lstStyle/>
           <a:p>
-            <a:pPr algn="ctr" indent="0" marL="0">
+            <a:pPr marL="0" indent="0" algn="ctr">
               <a:buNone/>
             </a:pPr>
             <a:r>
@@ -4544,6 +4288,7 @@
         <a:solidFill>
           <a:srgbClr val="0D1321"/>
         </a:solidFill>
+        <a:effectLst/>
       </p:bgPr>
     </p:bg>
     <p:spTree>
@@ -4581,7 +4326,7 @@
           <a:bodyPr wrap="square" rtlCol="0" anchor="ctr"/>
           <a:lstStyle/>
           <a:p>
-            <a:pPr algn="ctr" indent="0" marL="0">
+            <a:pPr marL="0" indent="0" algn="ctr">
               <a:buNone/>
             </a:pPr>
             <a:r>
@@ -4620,7 +4365,7 @@
           <a:bodyPr wrap="square" rtlCol="0" anchor="ctr"/>
           <a:lstStyle/>
           <a:p>
-            <a:pPr algn="ctr" indent="0" marL="0">
+            <a:pPr marL="0" indent="0" algn="ctr">
               <a:buNone/>
             </a:pPr>
             <a:r>
@@ -4684,7 +4429,7 @@
           <a:bodyPr wrap="square" lIns="0" tIns="0" rIns="0" bIns="0" rtlCol="0" anchor="ctr"/>
           <a:lstStyle/>
           <a:p>
-            <a:pPr indent="0" marL="0">
+            <a:pPr marL="0" indent="0">
               <a:buNone/>
             </a:pPr>
             <a:r>
@@ -4748,7 +4493,7 @@
           <a:bodyPr wrap="square" lIns="0" tIns="0" rIns="0" bIns="0" rtlCol="0" anchor="ctr"/>
           <a:lstStyle/>
           <a:p>
-            <a:pPr indent="0" marL="0">
+            <a:pPr marL="0" indent="0">
               <a:buNone/>
             </a:pPr>
             <a:r>
@@ -4812,7 +4557,7 @@
           <a:bodyPr wrap="square" lIns="0" tIns="0" rIns="0" bIns="0" rtlCol="0" anchor="ctr"/>
           <a:lstStyle/>
           <a:p>
-            <a:pPr indent="0" marL="0">
+            <a:pPr marL="0" indent="0">
               <a:buNone/>
             </a:pPr>
             <a:r>
@@ -4876,7 +4621,7 @@
           <a:bodyPr wrap="square" lIns="0" tIns="0" rIns="0" bIns="0" rtlCol="0" anchor="ctr"/>
           <a:lstStyle/>
           <a:p>
-            <a:pPr indent="0" marL="0">
+            <a:pPr marL="0" indent="0">
               <a:buNone/>
             </a:pPr>
             <a:r>
@@ -4935,7 +4680,7 @@
           <a:bodyPr wrap="square" lIns="0" tIns="0" rIns="0" bIns="0" rtlCol="0" anchor="t"/>
           <a:lstStyle/>
           <a:p>
-            <a:pPr indent="0" marL="0">
+            <a:pPr marL="0" indent="0">
               <a:buNone/>
             </a:pPr>
             <a:r>
@@ -4969,6 +4714,7 @@
         <a:solidFill>
           <a:srgbClr val="1A2540"/>
         </a:solidFill>
+        <a:effectLst/>
       </p:bgPr>
     </p:bg>
     <p:spTree>
@@ -5006,7 +4752,7 @@
           <a:bodyPr wrap="square" rtlCol="0" anchor="ctr"/>
           <a:lstStyle/>
           <a:p>
-            <a:pPr indent="0" marL="0">
+            <a:pPr marL="0" indent="0">
               <a:buNone/>
             </a:pPr>
             <a:r>
@@ -5045,7 +4791,7 @@
           <a:bodyPr wrap="square" lIns="0" tIns="0" rIns="0" bIns="0" rtlCol="0" anchor="ctr"/>
           <a:lstStyle/>
           <a:p>
-            <a:pPr indent="0" marL="0">
+            <a:pPr marL="0" indent="0">
               <a:buNone/>
             </a:pPr>
             <a:r>
@@ -5104,7 +4850,7 @@
           <a:bodyPr wrap="square" lIns="0" tIns="0" rIns="0" bIns="0" rtlCol="0" anchor="t"/>
           <a:lstStyle/>
           <a:p>
-            <a:pPr indent="0" marL="0">
+            <a:pPr marL="0" indent="0">
               <a:buNone/>
             </a:pPr>
             <a:r>
@@ -5121,7 +4867,7 @@
             <a:endParaRPr lang="en-US" sz="850" dirty="0"/>
           </a:p>
           <a:p>
-            <a:pPr indent="0" marL="0">
+            <a:pPr marL="0" indent="0">
               <a:buNone/>
             </a:pPr>
             <a:r>
@@ -5138,7 +4884,7 @@
             <a:endParaRPr lang="en-US" sz="850" dirty="0"/>
           </a:p>
           <a:p>
-            <a:pPr indent="0" marL="0">
+            <a:pPr marL="0" indent="0">
               <a:buNone/>
             </a:pPr>
             <a:r>
@@ -5155,7 +4901,7 @@
             <a:endParaRPr lang="en-US" sz="850" dirty="0"/>
           </a:p>
           <a:p>
-            <a:pPr indent="0" marL="0">
+            <a:pPr marL="0" indent="0">
               <a:buNone/>
             </a:pPr>
             <a:r>
@@ -5194,7 +4940,7 @@
           <a:bodyPr wrap="square" lIns="0" tIns="0" rIns="0" bIns="0" rtlCol="0" anchor="ctr"/>
           <a:lstStyle/>
           <a:p>
-            <a:pPr indent="0" marL="0">
+            <a:pPr marL="0" indent="0">
               <a:buNone/>
             </a:pPr>
             <a:r>
@@ -5253,7 +4999,7 @@
           <a:bodyPr wrap="square" lIns="0" tIns="0" rIns="0" bIns="0" rtlCol="0" anchor="t"/>
           <a:lstStyle/>
           <a:p>
-            <a:pPr indent="0" marL="0">
+            <a:pPr marL="0" indent="0">
               <a:buNone/>
             </a:pPr>
             <a:r>
@@ -5270,7 +5016,7 @@
             <a:endParaRPr lang="en-US" sz="850" dirty="0"/>
           </a:p>
           <a:p>
-            <a:pPr indent="0" marL="0">
+            <a:pPr marL="0" indent="0">
               <a:buNone/>
             </a:pPr>
             <a:r>
@@ -5287,7 +5033,7 @@
             <a:endParaRPr lang="en-US" sz="850" dirty="0"/>
           </a:p>
           <a:p>
-            <a:pPr indent="0" marL="0">
+            <a:pPr marL="0" indent="0">
               <a:buNone/>
             </a:pPr>
             <a:r>
@@ -5304,7 +5050,7 @@
             <a:endParaRPr lang="en-US" sz="850" dirty="0"/>
           </a:p>
           <a:p>
-            <a:pPr indent="0" marL="0">
+            <a:pPr marL="0" indent="0">
               <a:buNone/>
             </a:pPr>
             <a:r>
@@ -5321,7 +5067,7 @@
             <a:endParaRPr lang="en-US" sz="850" dirty="0"/>
           </a:p>
           <a:p>
-            <a:pPr indent="0" marL="0">
+            <a:pPr marL="0" indent="0">
               <a:buNone/>
             </a:pPr>
             <a:r>
@@ -5338,7 +5084,7 @@
             <a:endParaRPr lang="en-US" sz="850" dirty="0"/>
           </a:p>
           <a:p>
-            <a:pPr indent="0" marL="0">
+            <a:pPr marL="0" indent="0">
               <a:buNone/>
             </a:pPr>
             <a:r>
@@ -5355,7 +5101,7 @@
             <a:endParaRPr lang="en-US" sz="850" dirty="0"/>
           </a:p>
           <a:p>
-            <a:pPr indent="0" marL="0">
+            <a:pPr marL="0" indent="0">
               <a:buNone/>
             </a:pPr>
             <a:r>
@@ -5372,7 +5118,7 @@
             <a:endParaRPr lang="en-US" sz="850" dirty="0"/>
           </a:p>
           <a:p>
-            <a:pPr indent="0" marL="0">
+            <a:pPr marL="0" indent="0">
               <a:buNone/>
             </a:pPr>
             <a:r>
@@ -5411,7 +5157,7 @@
           <a:bodyPr wrap="square" lIns="0" tIns="0" rIns="0" bIns="0" rtlCol="0" anchor="ctr"/>
           <a:lstStyle/>
           <a:p>
-            <a:pPr indent="0" marL="0">
+            <a:pPr marL="0" indent="0">
               <a:buNone/>
             </a:pPr>
             <a:r>
@@ -5470,7 +5216,7 @@
           <a:bodyPr wrap="square" lIns="0" tIns="0" rIns="0" bIns="0" rtlCol="0" anchor="t"/>
           <a:lstStyle/>
           <a:p>
-            <a:pPr indent="0" marL="0">
+            <a:pPr marL="0" indent="0">
               <a:buNone/>
             </a:pPr>
             <a:r>
@@ -5487,7 +5233,7 @@
             <a:endParaRPr lang="en-US" sz="850" dirty="0"/>
           </a:p>
           <a:p>
-            <a:pPr indent="0" marL="0">
+            <a:pPr marL="0" indent="0">
               <a:buNone/>
             </a:pPr>
             <a:r>
@@ -5504,7 +5250,7 @@
             <a:endParaRPr lang="en-US" sz="850" dirty="0"/>
           </a:p>
           <a:p>
-            <a:pPr indent="0" marL="0">
+            <a:pPr marL="0" indent="0">
               <a:buNone/>
             </a:pPr>
             <a:r>
@@ -5521,7 +5267,7 @@
             <a:endParaRPr lang="en-US" sz="850" dirty="0"/>
           </a:p>
           <a:p>
-            <a:pPr indent="0" marL="0">
+            <a:pPr marL="0" indent="0">
               <a:buNone/>
             </a:pPr>
             <a:r>
@@ -5538,7 +5284,7 @@
             <a:endParaRPr lang="en-US" sz="850" dirty="0"/>
           </a:p>
           <a:p>
-            <a:pPr indent="0" marL="0">
+            <a:pPr marL="0" indent="0">
               <a:buNone/>
             </a:pPr>
             <a:r>
@@ -5555,7 +5301,7 @@
             <a:endParaRPr lang="en-US" sz="850" dirty="0"/>
           </a:p>
           <a:p>
-            <a:pPr indent="0" marL="0">
+            <a:pPr marL="0" indent="0">
               <a:buNone/>
             </a:pPr>
             <a:r>
@@ -5572,7 +5318,7 @@
             <a:endParaRPr lang="en-US" sz="850" dirty="0"/>
           </a:p>
           <a:p>
-            <a:pPr indent="0" marL="0">
+            <a:pPr marL="0" indent="0">
               <a:buNone/>
             </a:pPr>
             <a:r>
@@ -5589,7 +5335,7 @@
             <a:endParaRPr lang="en-US" sz="850" dirty="0"/>
           </a:p>
           <a:p>
-            <a:pPr indent="0" marL="0">
+            <a:pPr marL="0" indent="0">
               <a:buNone/>
             </a:pPr>
             <a:r>
@@ -5648,7 +5394,7 @@
           <a:bodyPr wrap="square" lIns="0" tIns="0" rIns="0" bIns="0" rtlCol="0" anchor="t"/>
           <a:lstStyle/>
           <a:p>
-            <a:pPr indent="0" marL="0">
+            <a:pPr marL="0" indent="0">
               <a:buNone/>
             </a:pPr>
             <a:r>
@@ -5662,9 +5408,6 @@
               </a:rPr>
               <a:t>form.checkValidity()</a:t>
             </a:r>
-            <a:pPr indent="0" marL="0">
-              <a:buNone/>
-            </a:pPr>
             <a:r>
               <a:rPr lang="en-US" sz="1050" dirty="0">
                 <a:solidFill>
@@ -5680,9 +5423,6 @@
 • No setCustomValidity() errors remain
 </a:t>
             </a:r>
-            <a:pPr indent="0" marL="0">
-              <a:buNone/>
-            </a:pPr>
             <a:r>
               <a:rPr lang="en-US" sz="1050" b="1" dirty="0">
                 <a:solidFill>
@@ -5694,9 +5434,6 @@
               </a:rPr>
               <a:t>Important:</a:t>
             </a:r>
-            <a:pPr indent="0" marL="0">
-              <a:buNone/>
-            </a:pPr>
             <a:r>
               <a:rPr lang="en-US" sz="1050" dirty="0">
                 <a:solidFill>
@@ -5733,7 +5470,7 @@
           <a:bodyPr wrap="square" rtlCol="0" anchor="ctr"/>
           <a:lstStyle/>
           <a:p>
-            <a:pPr algn="ctr" indent="0" marL="0">
+            <a:pPr marL="0" indent="0" algn="ctr">
               <a:buNone/>
             </a:pPr>
             <a:r>
@@ -5767,6 +5504,7 @@
         <a:solidFill>
           <a:srgbClr val="0D1321"/>
         </a:solidFill>
+        <a:effectLst/>
       </p:bgPr>
     </p:bg>
     <p:spTree>
@@ -5804,7 +5542,7 @@
           <a:bodyPr wrap="square" rtlCol="0" anchor="ctr"/>
           <a:lstStyle/>
           <a:p>
-            <a:pPr algn="ctr" indent="0" marL="0">
+            <a:pPr marL="0" indent="0" algn="ctr">
               <a:buNone/>
             </a:pPr>
             <a:r>
@@ -5843,7 +5581,7 @@
           <a:bodyPr wrap="square" rtlCol="0" anchor="ctr"/>
           <a:lstStyle/>
           <a:p>
-            <a:pPr algn="ctr" indent="0" marL="0">
+            <a:pPr marL="0" indent="0" algn="ctr">
               <a:buNone/>
             </a:pPr>
             <a:r>
@@ -5907,7 +5645,7 @@
           <a:bodyPr wrap="square" lIns="0" tIns="0" rIns="0" bIns="0" rtlCol="0" anchor="ctr"/>
           <a:lstStyle/>
           <a:p>
-            <a:pPr indent="0" marL="0">
+            <a:pPr marL="0" indent="0">
               <a:buNone/>
             </a:pPr>
             <a:r>
@@ -5971,7 +5709,7 @@
           <a:bodyPr wrap="square" lIns="0" tIns="0" rIns="0" bIns="0" rtlCol="0" anchor="ctr"/>
           <a:lstStyle/>
           <a:p>
-            <a:pPr indent="0" marL="0">
+            <a:pPr marL="0" indent="0">
               <a:buNone/>
             </a:pPr>
             <a:r>
@@ -6035,7 +5773,7 @@
           <a:bodyPr wrap="square" lIns="0" tIns="0" rIns="0" bIns="0" rtlCol="0" anchor="ctr"/>
           <a:lstStyle/>
           <a:p>
-            <a:pPr indent="0" marL="0">
+            <a:pPr marL="0" indent="0">
               <a:buNone/>
             </a:pPr>
             <a:r>
@@ -6099,7 +5837,7 @@
           <a:bodyPr wrap="square" lIns="0" tIns="0" rIns="0" bIns="0" rtlCol="0" anchor="ctr"/>
           <a:lstStyle/>
           <a:p>
-            <a:pPr indent="0" marL="0">
+            <a:pPr marL="0" indent="0">
               <a:buNone/>
             </a:pPr>
             <a:r>
@@ -6138,7 +5876,7 @@
           <a:bodyPr wrap="square" rtlCol="0" anchor="ctr"/>
           <a:lstStyle/>
           <a:p>
-            <a:pPr algn="ctr" indent="0" marL="0">
+            <a:pPr marL="0" indent="0" algn="ctr">
               <a:buNone/>
             </a:pPr>
             <a:r>
@@ -6172,6 +5910,7 @@
         <a:solidFill>
           <a:srgbClr val="0D1321"/>
         </a:solidFill>
+        <a:effectLst/>
       </p:bgPr>
     </p:bg>
     <p:spTree>
@@ -6209,7 +5948,7 @@
           <a:bodyPr wrap="square" rtlCol="0" anchor="ctr"/>
           <a:lstStyle/>
           <a:p>
-            <a:pPr algn="ctr" indent="0" marL="0">
+            <a:pPr marL="0" indent="0" algn="ctr">
               <a:buNone/>
             </a:pPr>
             <a:r>
@@ -6248,7 +5987,7 @@
           <a:bodyPr wrap="square" rtlCol="0" anchor="ctr"/>
           <a:lstStyle/>
           <a:p>
-            <a:pPr algn="ctr" indent="0" marL="0">
+            <a:pPr marL="0" indent="0" algn="ctr">
               <a:buNone/>
             </a:pPr>
             <a:r>
@@ -6312,7 +6051,7 @@
           <a:bodyPr wrap="square" lIns="0" tIns="0" rIns="0" bIns="0" rtlCol="0" anchor="ctr"/>
           <a:lstStyle/>
           <a:p>
-            <a:pPr indent="0" marL="0">
+            <a:pPr marL="0" indent="0">
               <a:buNone/>
             </a:pPr>
             <a:r>
@@ -6376,7 +6115,7 @@
           <a:bodyPr wrap="square" lIns="0" tIns="0" rIns="0" bIns="0" rtlCol="0" anchor="ctr"/>
           <a:lstStyle/>
           <a:p>
-            <a:pPr indent="0" marL="0">
+            <a:pPr marL="0" indent="0">
               <a:buNone/>
             </a:pPr>
             <a:r>
@@ -6440,7 +6179,7 @@
           <a:bodyPr wrap="square" lIns="0" tIns="0" rIns="0" bIns="0" rtlCol="0" anchor="ctr"/>
           <a:lstStyle/>
           <a:p>
-            <a:pPr indent="0" marL="0">
+            <a:pPr marL="0" indent="0">
               <a:buNone/>
             </a:pPr>
             <a:r>
@@ -6504,7 +6243,7 @@
           <a:bodyPr wrap="square" lIns="0" tIns="0" rIns="0" bIns="0" rtlCol="0" anchor="ctr"/>
           <a:lstStyle/>
           <a:p>
-            <a:pPr indent="0" marL="0">
+            <a:pPr marL="0" indent="0">
               <a:buNone/>
             </a:pPr>
             <a:r>
@@ -6563,7 +6302,7 @@
           <a:bodyPr wrap="square" lIns="0" tIns="0" rIns="0" bIns="0" rtlCol="0" anchor="t"/>
           <a:lstStyle/>
           <a:p>
-            <a:pPr indent="0" marL="0">
+            <a:pPr marL="0" indent="0">
               <a:buNone/>
             </a:pPr>
             <a:r>
@@ -6597,6 +6336,7 @@
         <a:solidFill>
           <a:srgbClr val="1A2540"/>
         </a:solidFill>
+        <a:effectLst/>
       </p:bgPr>
     </p:bg>
     <p:spTree>
@@ -6634,7 +6374,7 @@
           <a:bodyPr wrap="square" rtlCol="0" anchor="ctr"/>
           <a:lstStyle/>
           <a:p>
-            <a:pPr indent="0" marL="0">
+            <a:pPr marL="0" indent="0">
               <a:buNone/>
             </a:pPr>
             <a:r>
@@ -6673,7 +6413,7 @@
           <a:bodyPr wrap="square" lIns="0" tIns="0" rIns="0" bIns="0" rtlCol="0" anchor="ctr"/>
           <a:lstStyle/>
           <a:p>
-            <a:pPr indent="0" marL="0">
+            <a:pPr marL="0" indent="0">
               <a:buNone/>
             </a:pPr>
             <a:r>
@@ -6732,7 +6472,7 @@
           <a:bodyPr wrap="square" lIns="0" tIns="0" rIns="0" bIns="0" rtlCol="0" anchor="t"/>
           <a:lstStyle/>
           <a:p>
-            <a:pPr indent="0" marL="0">
+            <a:pPr marL="0" indent="0">
               <a:buNone/>
             </a:pPr>
             <a:r>
@@ -6749,7 +6489,7 @@
             <a:endParaRPr lang="en-US" sz="850" dirty="0"/>
           </a:p>
           <a:p>
-            <a:pPr indent="0" marL="0">
+            <a:pPr marL="0" indent="0">
               <a:buNone/>
             </a:pPr>
             <a:r>
@@ -6766,13 +6506,13 @@
             <a:endParaRPr lang="en-US" sz="850" dirty="0"/>
           </a:p>
           <a:p>
-            <a:pPr indent="0" marL="0">
-              <a:buNone/>
-            </a:pPr>
-            <a:endParaRPr lang="en-US" sz="850" dirty="0"/>
-          </a:p>
-          <a:p>
-            <a:pPr indent="0" marL="0">
+            <a:pPr marL="0" indent="0">
+              <a:buNone/>
+            </a:pPr>
+            <a:endParaRPr lang="en-US" sz="850" dirty="0"/>
+          </a:p>
+          <a:p>
+            <a:pPr marL="0" indent="0">
               <a:buNone/>
             </a:pPr>
             <a:r>
@@ -6789,7 +6529,7 @@
             <a:endParaRPr lang="en-US" sz="850" dirty="0"/>
           </a:p>
           <a:p>
-            <a:pPr indent="0" marL="0">
+            <a:pPr marL="0" indent="0">
               <a:buNone/>
             </a:pPr>
             <a:r>
@@ -6806,7 +6546,7 @@
             <a:endParaRPr lang="en-US" sz="850" dirty="0"/>
           </a:p>
           <a:p>
-            <a:pPr indent="0" marL="0">
+            <a:pPr marL="0" indent="0">
               <a:buNone/>
             </a:pPr>
             <a:r>
@@ -6823,7 +6563,7 @@
             <a:endParaRPr lang="en-US" sz="850" dirty="0"/>
           </a:p>
           <a:p>
-            <a:pPr indent="0" marL="0">
+            <a:pPr marL="0" indent="0">
               <a:buNone/>
             </a:pPr>
             <a:r>
@@ -6840,7 +6580,7 @@
             <a:endParaRPr lang="en-US" sz="850" dirty="0"/>
           </a:p>
           <a:p>
-            <a:pPr indent="0" marL="0">
+            <a:pPr marL="0" indent="0">
               <a:buNone/>
             </a:pPr>
             <a:r>
@@ -6857,7 +6597,7 @@
             <a:endParaRPr lang="en-US" sz="850" dirty="0"/>
           </a:p>
           <a:p>
-            <a:pPr indent="0" marL="0">
+            <a:pPr marL="0" indent="0">
               <a:buNone/>
             </a:pPr>
             <a:r>
@@ -6874,7 +6614,7 @@
             <a:endParaRPr lang="en-US" sz="850" dirty="0"/>
           </a:p>
           <a:p>
-            <a:pPr indent="0" marL="0">
+            <a:pPr marL="0" indent="0">
               <a:buNone/>
             </a:pPr>
             <a:r>
@@ -6891,7 +6631,7 @@
             <a:endParaRPr lang="en-US" sz="850" dirty="0"/>
           </a:p>
           <a:p>
-            <a:pPr indent="0" marL="0">
+            <a:pPr marL="0" indent="0">
               <a:buNone/>
             </a:pPr>
             <a:r>
@@ -6908,7 +6648,7 @@
             <a:endParaRPr lang="en-US" sz="850" dirty="0"/>
           </a:p>
           <a:p>
-            <a:pPr indent="0" marL="0">
+            <a:pPr marL="0" indent="0">
               <a:buNone/>
             </a:pPr>
             <a:r>
@@ -6925,13 +6665,13 @@
             <a:endParaRPr lang="en-US" sz="850" dirty="0"/>
           </a:p>
           <a:p>
-            <a:pPr indent="0" marL="0">
-              <a:buNone/>
-            </a:pPr>
-            <a:endParaRPr lang="en-US" sz="850" dirty="0"/>
-          </a:p>
-          <a:p>
-            <a:pPr indent="0" marL="0">
+            <a:pPr marL="0" indent="0">
+              <a:buNone/>
+            </a:pPr>
+            <a:endParaRPr lang="en-US" sz="850" dirty="0"/>
+          </a:p>
+          <a:p>
+            <a:pPr marL="0" indent="0">
               <a:buNone/>
             </a:pPr>
             <a:r>
@@ -6948,7 +6688,7 @@
             <a:endParaRPr lang="en-US" sz="850" dirty="0"/>
           </a:p>
           <a:p>
-            <a:pPr indent="0" marL="0">
+            <a:pPr marL="0" indent="0">
               <a:buNone/>
             </a:pPr>
             <a:r>
@@ -6965,7 +6705,7 @@
             <a:endParaRPr lang="en-US" sz="850" dirty="0"/>
           </a:p>
           <a:p>
-            <a:pPr indent="0" marL="0">
+            <a:pPr marL="0" indent="0">
               <a:buNone/>
             </a:pPr>
             <a:r>
@@ -6982,7 +6722,7 @@
             <a:endParaRPr lang="en-US" sz="850" dirty="0"/>
           </a:p>
           <a:p>
-            <a:pPr indent="0" marL="0">
+            <a:pPr marL="0" indent="0">
               <a:buNone/>
             </a:pPr>
             <a:r>
@@ -6999,7 +6739,7 @@
             <a:endParaRPr lang="en-US" sz="850" dirty="0"/>
           </a:p>
           <a:p>
-            <a:pPr indent="0" marL="0">
+            <a:pPr marL="0" indent="0">
               <a:buNone/>
             </a:pPr>
             <a:r>
@@ -7016,7 +6756,7 @@
             <a:endParaRPr lang="en-US" sz="850" dirty="0"/>
           </a:p>
           <a:p>
-            <a:pPr indent="0" marL="0">
+            <a:pPr marL="0" indent="0">
               <a:buNone/>
             </a:pPr>
             <a:r>
@@ -7033,7 +6773,7 @@
             <a:endParaRPr lang="en-US" sz="850" dirty="0"/>
           </a:p>
           <a:p>
-            <a:pPr indent="0" marL="0">
+            <a:pPr marL="0" indent="0">
               <a:buNone/>
             </a:pPr>
             <a:r>
@@ -7050,7 +6790,7 @@
             <a:endParaRPr lang="en-US" sz="850" dirty="0"/>
           </a:p>
           <a:p>
-            <a:pPr indent="0" marL="0">
+            <a:pPr marL="0" indent="0">
               <a:buNone/>
             </a:pPr>
             <a:r>
@@ -7067,7 +6807,7 @@
             <a:endParaRPr lang="en-US" sz="850" dirty="0"/>
           </a:p>
           <a:p>
-            <a:pPr indent="0" marL="0">
+            <a:pPr marL="0" indent="0">
               <a:buNone/>
             </a:pPr>
             <a:r>
@@ -7084,7 +6824,7 @@
             <a:endParaRPr lang="en-US" sz="850" dirty="0"/>
           </a:p>
           <a:p>
-            <a:pPr indent="0" marL="0">
+            <a:pPr marL="0" indent="0">
               <a:buNone/>
             </a:pPr>
             <a:r>
@@ -7123,7 +6863,7 @@
           <a:bodyPr wrap="square" lIns="0" tIns="0" rIns="0" bIns="0" rtlCol="0" anchor="ctr"/>
           <a:lstStyle/>
           <a:p>
-            <a:pPr indent="0" marL="0">
+            <a:pPr marL="0" indent="0">
               <a:buNone/>
             </a:pPr>
             <a:r>
@@ -7182,7 +6922,7 @@
           <a:bodyPr wrap="square" lIns="0" tIns="0" rIns="0" bIns="0" rtlCol="0" anchor="t"/>
           <a:lstStyle/>
           <a:p>
-            <a:pPr indent="0" marL="0">
+            <a:pPr marL="0" indent="0">
               <a:buNone/>
             </a:pPr>
             <a:r>
@@ -7199,7 +6939,7 @@
             <a:endParaRPr lang="en-US" sz="850" dirty="0"/>
           </a:p>
           <a:p>
-            <a:pPr indent="0" marL="0">
+            <a:pPr marL="0" indent="0">
               <a:buNone/>
             </a:pPr>
             <a:r>
@@ -7216,7 +6956,7 @@
             <a:endParaRPr lang="en-US" sz="850" dirty="0"/>
           </a:p>
           <a:p>
-            <a:pPr indent="0" marL="0">
+            <a:pPr marL="0" indent="0">
               <a:buNone/>
             </a:pPr>
             <a:r>
@@ -7233,7 +6973,7 @@
             <a:endParaRPr lang="en-US" sz="850" dirty="0"/>
           </a:p>
           <a:p>
-            <a:pPr indent="0" marL="0">
+            <a:pPr marL="0" indent="0">
               <a:buNone/>
             </a:pPr>
             <a:r>
@@ -7250,7 +6990,7 @@
             <a:endParaRPr lang="en-US" sz="850" dirty="0"/>
           </a:p>
           <a:p>
-            <a:pPr indent="0" marL="0">
+            <a:pPr marL="0" indent="0">
               <a:buNone/>
             </a:pPr>
             <a:r>
@@ -7267,7 +7007,7 @@
             <a:endParaRPr lang="en-US" sz="850" dirty="0"/>
           </a:p>
           <a:p>
-            <a:pPr indent="0" marL="0">
+            <a:pPr marL="0" indent="0">
               <a:buNone/>
             </a:pPr>
             <a:r>
@@ -7284,13 +7024,13 @@
             <a:endParaRPr lang="en-US" sz="850" dirty="0"/>
           </a:p>
           <a:p>
-            <a:pPr indent="0" marL="0">
-              <a:buNone/>
-            </a:pPr>
-            <a:endParaRPr lang="en-US" sz="850" dirty="0"/>
-          </a:p>
-          <a:p>
-            <a:pPr indent="0" marL="0">
+            <a:pPr marL="0" indent="0">
+              <a:buNone/>
+            </a:pPr>
+            <a:endParaRPr lang="en-US" sz="850" dirty="0"/>
+          </a:p>
+          <a:p>
+            <a:pPr marL="0" indent="0">
               <a:buNone/>
             </a:pPr>
             <a:r>
@@ -7307,7 +7047,7 @@
             <a:endParaRPr lang="en-US" sz="850" dirty="0"/>
           </a:p>
           <a:p>
-            <a:pPr indent="0" marL="0">
+            <a:pPr marL="0" indent="0">
               <a:buNone/>
             </a:pPr>
             <a:r>
@@ -7324,7 +7064,7 @@
             <a:endParaRPr lang="en-US" sz="850" dirty="0"/>
           </a:p>
           <a:p>
-            <a:pPr indent="0" marL="0">
+            <a:pPr marL="0" indent="0">
               <a:buNone/>
             </a:pPr>
             <a:r>
@@ -7341,7 +7081,7 @@
             <a:endParaRPr lang="en-US" sz="850" dirty="0"/>
           </a:p>
           <a:p>
-            <a:pPr indent="0" marL="0">
+            <a:pPr marL="0" indent="0">
               <a:buNone/>
             </a:pPr>
             <a:r>
@@ -7358,7 +7098,7 @@
             <a:endParaRPr lang="en-US" sz="850" dirty="0"/>
           </a:p>
           <a:p>
-            <a:pPr indent="0" marL="0">
+            <a:pPr marL="0" indent="0">
               <a:buNone/>
             </a:pPr>
             <a:r>
@@ -7375,7 +7115,7 @@
             <a:endParaRPr lang="en-US" sz="850" dirty="0"/>
           </a:p>
           <a:p>
-            <a:pPr indent="0" marL="0">
+            <a:pPr marL="0" indent="0">
               <a:buNone/>
             </a:pPr>
             <a:r>
@@ -7392,13 +7132,13 @@
             <a:endParaRPr lang="en-US" sz="850" dirty="0"/>
           </a:p>
           <a:p>
-            <a:pPr indent="0" marL="0">
-              <a:buNone/>
-            </a:pPr>
-            <a:endParaRPr lang="en-US" sz="850" dirty="0"/>
-          </a:p>
-          <a:p>
-            <a:pPr indent="0" marL="0">
+            <a:pPr marL="0" indent="0">
+              <a:buNone/>
+            </a:pPr>
+            <a:endParaRPr lang="en-US" sz="850" dirty="0"/>
+          </a:p>
+          <a:p>
+            <a:pPr marL="0" indent="0">
               <a:buNone/>
             </a:pPr>
             <a:r>
@@ -7415,7 +7155,7 @@
             <a:endParaRPr lang="en-US" sz="850" dirty="0"/>
           </a:p>
           <a:p>
-            <a:pPr indent="0" marL="0">
+            <a:pPr marL="0" indent="0">
               <a:buNone/>
             </a:pPr>
             <a:r>
@@ -7432,7 +7172,7 @@
             <a:endParaRPr lang="en-US" sz="850" dirty="0"/>
           </a:p>
           <a:p>
-            <a:pPr indent="0" marL="0">
+            <a:pPr marL="0" indent="0">
               <a:buNone/>
             </a:pPr>
             <a:r>
@@ -7449,7 +7189,7 @@
             <a:endParaRPr lang="en-US" sz="850" dirty="0"/>
           </a:p>
           <a:p>
-            <a:pPr indent="0" marL="0">
+            <a:pPr marL="0" indent="0">
               <a:buNone/>
             </a:pPr>
             <a:r>
@@ -7466,7 +7206,7 @@
             <a:endParaRPr lang="en-US" sz="850" dirty="0"/>
           </a:p>
           <a:p>
-            <a:pPr indent="0" marL="0">
+            <a:pPr marL="0" indent="0">
               <a:buNone/>
             </a:pPr>
             <a:r>
@@ -7505,7 +7245,7 @@
           <a:bodyPr wrap="square" rtlCol="0" anchor="ctr"/>
           <a:lstStyle/>
           <a:p>
-            <a:pPr algn="ctr" indent="0" marL="0">
+            <a:pPr marL="0" indent="0" algn="ctr">
               <a:buNone/>
             </a:pPr>
             <a:r>
@@ -7539,6 +7279,7 @@
         <a:solidFill>
           <a:srgbClr val="1A2540"/>
         </a:solidFill>
+        <a:effectLst/>
       </p:bgPr>
     </p:bg>
     <p:spTree>
@@ -7576,7 +7317,7 @@
           <a:bodyPr wrap="square" rtlCol="0" anchor="ctr"/>
           <a:lstStyle/>
           <a:p>
-            <a:pPr indent="0" marL="0">
+            <a:pPr marL="0" indent="0">
               <a:buNone/>
             </a:pPr>
             <a:r>
@@ -7635,7 +7376,7 @@
           <a:bodyPr wrap="square" lIns="0" tIns="0" rIns="0" bIns="0" rtlCol="0" anchor="ctr"/>
           <a:lstStyle/>
           <a:p>
-            <a:pPr indent="0" marL="0">
+            <a:pPr marL="0" indent="0">
               <a:buNone/>
             </a:pPr>
             <a:r>
@@ -7674,7 +7415,7 @@
           <a:bodyPr wrap="square" lIns="0" tIns="0" rIns="0" bIns="0" rtlCol="0" anchor="ctr"/>
           <a:lstStyle/>
           <a:p>
-            <a:pPr indent="0" marL="0">
+            <a:pPr marL="0" indent="0">
               <a:buNone/>
             </a:pPr>
             <a:r>
@@ -7733,7 +7474,7 @@
           <a:bodyPr wrap="square" lIns="0" tIns="0" rIns="0" bIns="0" rtlCol="0" anchor="ctr"/>
           <a:lstStyle/>
           <a:p>
-            <a:pPr indent="0" marL="0">
+            <a:pPr marL="0" indent="0">
               <a:buNone/>
             </a:pPr>
             <a:r>
@@ -7772,7 +7513,7 @@
           <a:bodyPr wrap="square" lIns="0" tIns="0" rIns="0" bIns="0" rtlCol="0" anchor="ctr"/>
           <a:lstStyle/>
           <a:p>
-            <a:pPr indent="0" marL="0">
+            <a:pPr marL="0" indent="0">
               <a:buNone/>
             </a:pPr>
             <a:r>
@@ -7831,7 +7572,7 @@
           <a:bodyPr wrap="square" lIns="0" tIns="0" rIns="0" bIns="0" rtlCol="0" anchor="ctr"/>
           <a:lstStyle/>
           <a:p>
-            <a:pPr indent="0" marL="0">
+            <a:pPr marL="0" indent="0">
               <a:buNone/>
             </a:pPr>
             <a:r>
@@ -7870,7 +7611,7 @@
           <a:bodyPr wrap="square" lIns="0" tIns="0" rIns="0" bIns="0" rtlCol="0" anchor="ctr"/>
           <a:lstStyle/>
           <a:p>
-            <a:pPr indent="0" marL="0">
+            <a:pPr marL="0" indent="0">
               <a:buNone/>
             </a:pPr>
             <a:r>
@@ -7929,7 +7670,7 @@
           <a:bodyPr wrap="square" lIns="0" tIns="0" rIns="0" bIns="0" rtlCol="0" anchor="ctr"/>
           <a:lstStyle/>
           <a:p>
-            <a:pPr indent="0" marL="0">
+            <a:pPr marL="0" indent="0">
               <a:buNone/>
             </a:pPr>
             <a:r>
@@ -7968,7 +7709,7 @@
           <a:bodyPr wrap="square" lIns="0" tIns="0" rIns="0" bIns="0" rtlCol="0" anchor="ctr"/>
           <a:lstStyle/>
           <a:p>
-            <a:pPr indent="0" marL="0">
+            <a:pPr marL="0" indent="0">
               <a:buNone/>
             </a:pPr>
             <a:r>
@@ -8027,7 +7768,7 @@
           <a:bodyPr wrap="square" lIns="0" tIns="0" rIns="0" bIns="0" rtlCol="0" anchor="ctr"/>
           <a:lstStyle/>
           <a:p>
-            <a:pPr indent="0" marL="0">
+            <a:pPr marL="0" indent="0">
               <a:buNone/>
             </a:pPr>
             <a:r>
@@ -8066,7 +7807,7 @@
           <a:bodyPr wrap="square" lIns="0" tIns="0" rIns="0" bIns="0" rtlCol="0" anchor="ctr"/>
           <a:lstStyle/>
           <a:p>
-            <a:pPr indent="0" marL="0">
+            <a:pPr marL="0" indent="0">
               <a:buNone/>
             </a:pPr>
             <a:r>
@@ -8125,7 +7866,7 @@
           <a:bodyPr wrap="square" lIns="0" tIns="0" rIns="0" bIns="0" rtlCol="0" anchor="ctr"/>
           <a:lstStyle/>
           <a:p>
-            <a:pPr indent="0" marL="0">
+            <a:pPr marL="0" indent="0">
               <a:buNone/>
             </a:pPr>
             <a:r>
@@ -8164,7 +7905,7 @@
           <a:bodyPr wrap="square" lIns="0" tIns="0" rIns="0" bIns="0" rtlCol="0" anchor="ctr"/>
           <a:lstStyle/>
           <a:p>
-            <a:pPr indent="0" marL="0">
+            <a:pPr marL="0" indent="0">
               <a:buNone/>
             </a:pPr>
             <a:r>
@@ -8190,8 +7931,8 @@
         </p:nvSpPr>
         <p:spPr>
           <a:xfrm>
-            <a:off x="274320" y="3063240"/>
-            <a:ext cx="8595360" cy="1719072"/>
+            <a:off x="274320" y="2905179"/>
+            <a:ext cx="8595360" cy="889581"/>
           </a:xfrm>
           <a:prstGeom prst="rect">
             <a:avLst/>
@@ -8215,7 +7956,7 @@
         </p:nvSpPr>
         <p:spPr>
           <a:xfrm>
-            <a:off x="411480" y="3127248"/>
+            <a:off x="457200" y="2939143"/>
             <a:ext cx="8321040" cy="347472"/>
           </a:xfrm>
           <a:prstGeom prst="rect">
@@ -8228,7 +7969,7 @@
           <a:bodyPr wrap="square" lIns="0" tIns="0" rIns="0" bIns="0" rtlCol="0" anchor="ctr"/>
           <a:lstStyle/>
           <a:p>
-            <a:pPr indent="0" marL="0">
+            <a:pPr marL="0" indent="0">
               <a:buNone/>
             </a:pPr>
             <a:r>
@@ -8254,7 +7995,7 @@
         </p:nvSpPr>
         <p:spPr>
           <a:xfrm>
-            <a:off x="411480" y="3520440"/>
+            <a:off x="411480" y="3211503"/>
             <a:ext cx="8321040" cy="1216152"/>
           </a:xfrm>
           <a:prstGeom prst="rect">
@@ -8267,7 +8008,7 @@
           <a:bodyPr wrap="square" lIns="0" tIns="0" rIns="0" bIns="0" rtlCol="0" anchor="t"/>
           <a:lstStyle/>
           <a:p>
-            <a:pPr indent="0" marL="0">
+            <a:pPr marL="0" indent="0">
               <a:buNone/>
             </a:pPr>
             <a:r>
@@ -8306,7 +8047,7 @@
           <a:bodyPr wrap="square" rtlCol="0" anchor="ctr"/>
           <a:lstStyle/>
           <a:p>
-            <a:pPr algn="ctr" indent="0" marL="0">
+            <a:pPr marL="0" indent="0" algn="ctr">
               <a:buNone/>
             </a:pPr>
             <a:r>
@@ -8321,6 +8062,147 @@
               <a:t>K0126002  ·  Gachon University  ·  2026 Fall  ·  Dr. Toshpulatov</a:t>
             </a:r>
             <a:endParaRPr lang="en-US" sz="800" dirty="0"/>
+          </a:p>
+        </p:txBody>
+      </p:sp>
+      <p:sp>
+        <p:nvSpPr>
+          <p:cNvPr id="26" name="TextBox 25">
+            <a:extLst>
+              <a:ext uri="{FF2B5EF4-FFF2-40B4-BE49-F238E27FC236}">
+                <a16:creationId xmlns:a16="http://schemas.microsoft.com/office/drawing/2014/main" id="{0B448C50-15B1-B604-C1A2-E58D800603F3}"/>
+              </a:ext>
+            </a:extLst>
+          </p:cNvPr>
+          <p:cNvSpPr txBox="1"/>
+          <p:nvPr/>
+        </p:nvSpPr>
+        <p:spPr>
+          <a:xfrm>
+            <a:off x="274320" y="3782340"/>
+            <a:ext cx="8699863" cy="369332"/>
+          </a:xfrm>
+          <a:prstGeom prst="rect">
+            <a:avLst/>
+          </a:prstGeom>
+          <a:noFill/>
+        </p:spPr>
+        <p:txBody>
+          <a:bodyPr wrap="square">
+            <a:spAutoFit/>
+          </a:bodyPr>
+          <a:lstStyle/>
+          <a:p>
+            <a:r>
+              <a:rPr lang="en-US" altLang="ko-KR" b="0" i="0" u="none" strike="noStrike" dirty="0">
+                <a:solidFill>
+                  <a:srgbClr val="1F2328"/>
+                </a:solidFill>
+                <a:effectLst/>
+                <a:latin typeface="Mona Sans VF"/>
+                <a:hlinkClick r:id="rId3" tooltip="WebPro_Week6_Fri_StudyGuide_v2.html"/>
+              </a:rPr>
+              <a:t>WebPro_StudyGuide_v2.html</a:t>
+            </a:r>
+            <a:endParaRPr lang="ko-KR" altLang="en-US" dirty="0">
+              <a:solidFill>
+                <a:srgbClr val="00B0F0"/>
+              </a:solidFill>
+            </a:endParaRPr>
+          </a:p>
+        </p:txBody>
+      </p:sp>
+      <p:sp>
+        <p:nvSpPr>
+          <p:cNvPr id="29" name="TextBox 28">
+            <a:extLst>
+              <a:ext uri="{FF2B5EF4-FFF2-40B4-BE49-F238E27FC236}">
+                <a16:creationId xmlns:a16="http://schemas.microsoft.com/office/drawing/2014/main" id="{FDB556D1-1FCF-CF3B-C021-0F8EA08443A2}"/>
+              </a:ext>
+            </a:extLst>
+          </p:cNvPr>
+          <p:cNvSpPr txBox="1"/>
+          <p:nvPr/>
+        </p:nvSpPr>
+        <p:spPr>
+          <a:xfrm>
+            <a:off x="274320" y="4109750"/>
+            <a:ext cx="8699863" cy="369332"/>
+          </a:xfrm>
+          <a:prstGeom prst="rect">
+            <a:avLst/>
+          </a:prstGeom>
+          <a:noFill/>
+        </p:spPr>
+        <p:txBody>
+          <a:bodyPr wrap="square">
+            <a:spAutoFit/>
+          </a:bodyPr>
+          <a:lstStyle/>
+          <a:p>
+            <a:r>
+              <a:rPr lang="en-US" altLang="ko-KR" b="0" i="0" u="sng" dirty="0">
+                <a:solidFill>
+                  <a:srgbClr val="0969DA"/>
+                </a:solidFill>
+                <a:effectLst/>
+                <a:latin typeface="Mona Sans VF"/>
+                <a:hlinkClick r:id="rId4" tooltip="WebPro_Week6_Fri_VideoLecture.html"/>
+              </a:rPr>
+              <a:t>WebPro_VideoLecture.html</a:t>
+            </a:r>
+            <a:endParaRPr lang="ko-KR" altLang="en-US" dirty="0">
+              <a:solidFill>
+                <a:srgbClr val="00B0F0"/>
+              </a:solidFill>
+            </a:endParaRPr>
+          </a:p>
+        </p:txBody>
+      </p:sp>
+      <p:sp>
+        <p:nvSpPr>
+          <p:cNvPr id="30" name="TextBox 29">
+            <a:extLst>
+              <a:ext uri="{FF2B5EF4-FFF2-40B4-BE49-F238E27FC236}">
+                <a16:creationId xmlns:a16="http://schemas.microsoft.com/office/drawing/2014/main" id="{F7B99B67-8DF0-8A5A-0B17-B64EC38FBC16}"/>
+              </a:ext>
+            </a:extLst>
+          </p:cNvPr>
+          <p:cNvSpPr txBox="1"/>
+          <p:nvPr/>
+        </p:nvSpPr>
+        <p:spPr>
+          <a:xfrm>
+            <a:off x="274320" y="4447890"/>
+            <a:ext cx="8699863" cy="369332"/>
+          </a:xfrm>
+          <a:prstGeom prst="rect">
+            <a:avLst/>
+          </a:prstGeom>
+          <a:noFill/>
+        </p:spPr>
+        <p:txBody>
+          <a:bodyPr wrap="square">
+            <a:spAutoFit/>
+          </a:bodyPr>
+          <a:lstStyle/>
+          <a:p>
+            <a:r>
+              <a:rPr lang="en-US" altLang="ko-KR" b="0" i="0" u="sng" dirty="0">
+                <a:solidFill>
+                  <a:srgbClr val="0969DA"/>
+                </a:solidFill>
+                <a:effectLst/>
+                <a:latin typeface="Mona Sans VF"/>
+                <a:hlinkClick r:id="rId5" tooltip="WebPro_Week6_Fri_FormValidation_v3.pdf"/>
+              </a:rPr>
+              <a:t>WebPro_FormValidation_v3.pdf</a:t>
+            </a:r>
+            <a:endParaRPr lang="ko-KR" altLang="en-US" dirty="0">
+              <a:solidFill>
+                <a:srgbClr val="00B0F0"/>
+              </a:solidFill>
+            </a:endParaRPr>
           </a:p>
         </p:txBody>
       </p:sp>
@@ -8340,6 +8222,7 @@
         <a:solidFill>
           <a:srgbClr val="0D1321"/>
         </a:solidFill>
+        <a:effectLst/>
       </p:bgPr>
     </p:bg>
     <p:spTree>
@@ -8377,7 +8260,7 @@
           <a:bodyPr wrap="square" rtlCol="0" anchor="ctr"/>
           <a:lstStyle/>
           <a:p>
-            <a:pPr algn="ctr" indent="0" marL="0">
+            <a:pPr marL="0" indent="0" algn="ctr">
               <a:buNone/>
             </a:pPr>
             <a:r>
@@ -8475,6 +8358,7 @@
         <a:solidFill>
           <a:srgbClr val="1A2540"/>
         </a:solidFill>
+        <a:effectLst/>
       </p:bgPr>
     </p:bg>
     <p:spTree>
@@ -8512,7 +8396,7 @@
           <a:bodyPr wrap="square" rtlCol="0" anchor="ctr"/>
           <a:lstStyle/>
           <a:p>
-            <a:pPr indent="0" marL="0">
+            <a:pPr marL="0" indent="0">
               <a:buNone/>
             </a:pPr>
             <a:r>
@@ -8551,7 +8435,7 @@
           <a:bodyPr wrap="square" lIns="0" tIns="0" rIns="0" bIns="0" rtlCol="0" anchor="ctr"/>
           <a:lstStyle/>
           <a:p>
-            <a:pPr indent="0" marL="0">
+            <a:pPr marL="0" indent="0">
               <a:buNone/>
             </a:pPr>
             <a:r>
@@ -8610,7 +8494,7 @@
           <a:bodyPr wrap="square" lIns="0" tIns="0" rIns="0" bIns="0" rtlCol="0" anchor="t"/>
           <a:lstStyle/>
           <a:p>
-            <a:pPr indent="0" marL="0">
+            <a:pPr marL="0" indent="0">
               <a:buNone/>
             </a:pPr>
             <a:r>
@@ -8627,7 +8511,7 @@
             <a:endParaRPr lang="en-US" sz="850" dirty="0"/>
           </a:p>
           <a:p>
-            <a:pPr indent="0" marL="0">
+            <a:pPr marL="0" indent="0">
               <a:buNone/>
             </a:pPr>
             <a:r>
@@ -8644,7 +8528,7 @@
             <a:endParaRPr lang="en-US" sz="850" dirty="0"/>
           </a:p>
           <a:p>
-            <a:pPr indent="0" marL="0">
+            <a:pPr marL="0" indent="0">
               <a:buNone/>
             </a:pPr>
             <a:r>
@@ -8661,7 +8545,7 @@
             <a:endParaRPr lang="en-US" sz="850" dirty="0"/>
           </a:p>
           <a:p>
-            <a:pPr indent="0" marL="0">
+            <a:pPr marL="0" indent="0">
               <a:buNone/>
             </a:pPr>
             <a:r>
@@ -8678,7 +8562,7 @@
             <a:endParaRPr lang="en-US" sz="850" dirty="0"/>
           </a:p>
           <a:p>
-            <a:pPr indent="0" marL="0">
+            <a:pPr marL="0" indent="0">
               <a:buNone/>
             </a:pPr>
             <a:r>
@@ -8717,7 +8601,7 @@
           <a:bodyPr wrap="square" lIns="0" tIns="0" rIns="0" bIns="0" rtlCol="0" anchor="ctr"/>
           <a:lstStyle/>
           <a:p>
-            <a:pPr indent="0" marL="0">
+            <a:pPr marL="0" indent="0">
               <a:buNone/>
             </a:pPr>
             <a:r>
@@ -8776,7 +8660,7 @@
           <a:bodyPr wrap="square" lIns="0" tIns="0" rIns="0" bIns="0" rtlCol="0" anchor="t"/>
           <a:lstStyle/>
           <a:p>
-            <a:pPr indent="0" marL="0">
+            <a:pPr marL="0" indent="0">
               <a:buNone/>
             </a:pPr>
             <a:r>
@@ -8793,7 +8677,7 @@
             <a:endParaRPr lang="en-US" sz="850" dirty="0"/>
           </a:p>
           <a:p>
-            <a:pPr indent="0" marL="0">
+            <a:pPr marL="0" indent="0">
               <a:buNone/>
             </a:pPr>
             <a:r>
@@ -8810,7 +8694,7 @@
             <a:endParaRPr lang="en-US" sz="850" dirty="0"/>
           </a:p>
           <a:p>
-            <a:pPr indent="0" marL="0">
+            <a:pPr marL="0" indent="0">
               <a:buNone/>
             </a:pPr>
             <a:r>
@@ -8827,7 +8711,7 @@
             <a:endParaRPr lang="en-US" sz="850" dirty="0"/>
           </a:p>
           <a:p>
-            <a:pPr indent="0" marL="0">
+            <a:pPr marL="0" indent="0">
               <a:buNone/>
             </a:pPr>
             <a:r>
@@ -8844,7 +8728,7 @@
             <a:endParaRPr lang="en-US" sz="850" dirty="0"/>
           </a:p>
           <a:p>
-            <a:pPr indent="0" marL="0">
+            <a:pPr marL="0" indent="0">
               <a:buNone/>
             </a:pPr>
             <a:r>
@@ -8861,7 +8745,7 @@
             <a:endParaRPr lang="en-US" sz="850" dirty="0"/>
           </a:p>
           <a:p>
-            <a:pPr indent="0" marL="0">
+            <a:pPr marL="0" indent="0">
               <a:buNone/>
             </a:pPr>
             <a:r>
@@ -8878,7 +8762,7 @@
             <a:endParaRPr lang="en-US" sz="850" dirty="0"/>
           </a:p>
           <a:p>
-            <a:pPr indent="0" marL="0">
+            <a:pPr marL="0" indent="0">
               <a:buNone/>
             </a:pPr>
             <a:r>
@@ -8937,7 +8821,7 @@
           <a:bodyPr wrap="square" lIns="0" tIns="0" rIns="0" bIns="0" rtlCol="0" anchor="t"/>
           <a:lstStyle/>
           <a:p>
-            <a:pPr indent="0" marL="0">
+            <a:pPr marL="0" indent="0">
               <a:buNone/>
             </a:pPr>
             <a:r>
@@ -8954,7 +8838,7 @@
             <a:endParaRPr lang="en-US" sz="1050" dirty="0"/>
           </a:p>
           <a:p>
-            <a:pPr indent="0" marL="0">
+            <a:pPr marL="0" indent="0">
               <a:buNone/>
             </a:pPr>
             <a:r>
@@ -8971,7 +8855,7 @@
             <a:endParaRPr lang="en-US" sz="1050" dirty="0"/>
           </a:p>
           <a:p>
-            <a:pPr indent="0" marL="0">
+            <a:pPr marL="0" indent="0">
               <a:buNone/>
             </a:pPr>
             <a:r>
@@ -8988,7 +8872,7 @@
             <a:endParaRPr lang="en-US" sz="1050" dirty="0"/>
           </a:p>
           <a:p>
-            <a:pPr indent="0" marL="0">
+            <a:pPr marL="0" indent="0">
               <a:buNone/>
             </a:pPr>
             <a:r>
@@ -9005,7 +8889,7 @@
             <a:endParaRPr lang="en-US" sz="1050" dirty="0"/>
           </a:p>
           <a:p>
-            <a:pPr indent="0" marL="0">
+            <a:pPr marL="0" indent="0">
               <a:buNone/>
             </a:pPr>
             <a:r>
@@ -9064,7 +8948,7 @@
           <a:bodyPr wrap="square" lIns="0" tIns="0" rIns="0" bIns="0" rtlCol="0" anchor="t"/>
           <a:lstStyle/>
           <a:p>
-            <a:pPr indent="0" marL="0">
+            <a:pPr marL="0" indent="0">
               <a:buNone/>
             </a:pPr>
             <a:r>
@@ -9081,7 +8965,7 @@
             <a:endParaRPr lang="en-US" sz="1050" dirty="0"/>
           </a:p>
           <a:p>
-            <a:pPr indent="0" marL="0">
+            <a:pPr marL="0" indent="0">
               <a:buNone/>
             </a:pPr>
             <a:r>
@@ -9098,7 +8982,7 @@
             <a:endParaRPr lang="en-US" sz="1050" dirty="0"/>
           </a:p>
           <a:p>
-            <a:pPr indent="0" marL="0">
+            <a:pPr marL="0" indent="0">
               <a:buNone/>
             </a:pPr>
             <a:r>
@@ -9115,7 +8999,7 @@
             <a:endParaRPr lang="en-US" sz="1050" dirty="0"/>
           </a:p>
           <a:p>
-            <a:pPr indent="0" marL="0">
+            <a:pPr marL="0" indent="0">
               <a:buNone/>
             </a:pPr>
             <a:r>
@@ -9132,7 +9016,7 @@
             <a:endParaRPr lang="en-US" sz="1050" dirty="0"/>
           </a:p>
           <a:p>
-            <a:pPr indent="0" marL="0">
+            <a:pPr marL="0" indent="0">
               <a:buNone/>
             </a:pPr>
             <a:r>
@@ -9171,7 +9055,7 @@
           <a:bodyPr wrap="square" rtlCol="0" anchor="ctr"/>
           <a:lstStyle/>
           <a:p>
-            <a:pPr algn="ctr" indent="0" marL="0">
+            <a:pPr marL="0" indent="0" algn="ctr">
               <a:buNone/>
             </a:pPr>
             <a:r>
@@ -9205,6 +9089,7 @@
         <a:solidFill>
           <a:srgbClr val="1A2540"/>
         </a:solidFill>
+        <a:effectLst/>
       </p:bgPr>
     </p:bg>
     <p:spTree>
@@ -9242,7 +9127,7 @@
           <a:bodyPr wrap="square" rtlCol="0" anchor="ctr"/>
           <a:lstStyle/>
           <a:p>
-            <a:pPr indent="0" marL="0">
+            <a:pPr marL="0" indent="0">
               <a:buNone/>
             </a:pPr>
             <a:r>
@@ -9281,7 +9166,7 @@
           <a:bodyPr wrap="square" lIns="0" tIns="0" rIns="0" bIns="0" rtlCol="0" anchor="ctr"/>
           <a:lstStyle/>
           <a:p>
-            <a:pPr indent="0" marL="0">
+            <a:pPr marL="0" indent="0">
               <a:buNone/>
             </a:pPr>
             <a:r>
@@ -9340,7 +9225,7 @@
           <a:bodyPr wrap="square" lIns="0" tIns="0" rIns="0" bIns="0" rtlCol="0" anchor="t"/>
           <a:lstStyle/>
           <a:p>
-            <a:pPr indent="0" marL="0">
+            <a:pPr marL="0" indent="0">
               <a:buNone/>
             </a:pPr>
             <a:r>
@@ -9357,7 +9242,7 @@
             <a:endParaRPr lang="en-US" sz="850" dirty="0"/>
           </a:p>
           <a:p>
-            <a:pPr indent="0" marL="0">
+            <a:pPr marL="0" indent="0">
               <a:buNone/>
             </a:pPr>
             <a:r>
@@ -9374,7 +9259,7 @@
             <a:endParaRPr lang="en-US" sz="850" dirty="0"/>
           </a:p>
           <a:p>
-            <a:pPr indent="0" marL="0">
+            <a:pPr marL="0" indent="0">
               <a:buNone/>
             </a:pPr>
             <a:r>
@@ -9391,7 +9276,7 @@
             <a:endParaRPr lang="en-US" sz="850" dirty="0"/>
           </a:p>
           <a:p>
-            <a:pPr indent="0" marL="0">
+            <a:pPr marL="0" indent="0">
               <a:buNone/>
             </a:pPr>
             <a:r>
@@ -9408,7 +9293,7 @@
             <a:endParaRPr lang="en-US" sz="850" dirty="0"/>
           </a:p>
           <a:p>
-            <a:pPr indent="0" marL="0">
+            <a:pPr marL="0" indent="0">
               <a:buNone/>
             </a:pPr>
             <a:r>
@@ -9425,7 +9310,7 @@
             <a:endParaRPr lang="en-US" sz="850" dirty="0"/>
           </a:p>
           <a:p>
-            <a:pPr indent="0" marL="0">
+            <a:pPr marL="0" indent="0">
               <a:buNone/>
             </a:pPr>
             <a:r>
@@ -9464,7 +9349,7 @@
           <a:bodyPr wrap="square" lIns="0" tIns="0" rIns="0" bIns="0" rtlCol="0" anchor="ctr"/>
           <a:lstStyle/>
           <a:p>
-            <a:pPr indent="0" marL="0">
+            <a:pPr marL="0" indent="0">
               <a:buNone/>
             </a:pPr>
             <a:r>
@@ -9523,7 +9408,7 @@
           <a:bodyPr wrap="square" lIns="0" tIns="0" rIns="0" bIns="0" rtlCol="0" anchor="t"/>
           <a:lstStyle/>
           <a:p>
-            <a:pPr indent="0" marL="0">
+            <a:pPr marL="0" indent="0">
               <a:buNone/>
             </a:pPr>
             <a:r>
@@ -9540,13 +9425,13 @@
             <a:endParaRPr lang="en-US" sz="850" dirty="0"/>
           </a:p>
           <a:p>
-            <a:pPr indent="0" marL="0">
-              <a:buNone/>
-            </a:pPr>
-            <a:endParaRPr lang="en-US" sz="850" dirty="0"/>
-          </a:p>
-          <a:p>
-            <a:pPr indent="0" marL="0">
+            <a:pPr marL="0" indent="0">
+              <a:buNone/>
+            </a:pPr>
+            <a:endParaRPr lang="en-US" sz="850" dirty="0"/>
+          </a:p>
+          <a:p>
+            <a:pPr marL="0" indent="0">
               <a:buNone/>
             </a:pPr>
             <a:r>
@@ -9563,7 +9448,7 @@
             <a:endParaRPr lang="en-US" sz="850" dirty="0"/>
           </a:p>
           <a:p>
-            <a:pPr indent="0" marL="0">
+            <a:pPr marL="0" indent="0">
               <a:buNone/>
             </a:pPr>
             <a:r>
@@ -9580,13 +9465,13 @@
             <a:endParaRPr lang="en-US" sz="850" dirty="0"/>
           </a:p>
           <a:p>
-            <a:pPr indent="0" marL="0">
-              <a:buNone/>
-            </a:pPr>
-            <a:endParaRPr lang="en-US" sz="850" dirty="0"/>
-          </a:p>
-          <a:p>
-            <a:pPr indent="0" marL="0">
+            <a:pPr marL="0" indent="0">
+              <a:buNone/>
+            </a:pPr>
+            <a:endParaRPr lang="en-US" sz="850" dirty="0"/>
+          </a:p>
+          <a:p>
+            <a:pPr marL="0" indent="0">
               <a:buNone/>
             </a:pPr>
             <a:r>
@@ -9603,7 +9488,7 @@
             <a:endParaRPr lang="en-US" sz="850" dirty="0"/>
           </a:p>
           <a:p>
-            <a:pPr indent="0" marL="0">
+            <a:pPr marL="0" indent="0">
               <a:buNone/>
             </a:pPr>
             <a:r>
@@ -9620,7 +9505,7 @@
             <a:endParaRPr lang="en-US" sz="850" dirty="0"/>
           </a:p>
           <a:p>
-            <a:pPr indent="0" marL="0">
+            <a:pPr marL="0" indent="0">
               <a:buNone/>
             </a:pPr>
             <a:r>
@@ -9637,7 +9522,7 @@
             <a:endParaRPr lang="en-US" sz="850" dirty="0"/>
           </a:p>
           <a:p>
-            <a:pPr indent="0" marL="0">
+            <a:pPr marL="0" indent="0">
               <a:buNone/>
             </a:pPr>
             <a:r>
@@ -9654,7 +9539,7 @@
             <a:endParaRPr lang="en-US" sz="850" dirty="0"/>
           </a:p>
           <a:p>
-            <a:pPr indent="0" marL="0">
+            <a:pPr marL="0" indent="0">
               <a:buNone/>
             </a:pPr>
             <a:r>
@@ -9671,7 +9556,7 @@
             <a:endParaRPr lang="en-US" sz="850" dirty="0"/>
           </a:p>
           <a:p>
-            <a:pPr indent="0" marL="0">
+            <a:pPr marL="0" indent="0">
               <a:buNone/>
             </a:pPr>
             <a:r>
@@ -9688,7 +9573,7 @@
             <a:endParaRPr lang="en-US" sz="850" dirty="0"/>
           </a:p>
           <a:p>
-            <a:pPr indent="0" marL="0">
+            <a:pPr marL="0" indent="0">
               <a:buNone/>
             </a:pPr>
             <a:r>
@@ -9747,7 +9632,7 @@
           <a:bodyPr wrap="square" lIns="0" tIns="0" rIns="0" bIns="0" rtlCol="0" anchor="t"/>
           <a:lstStyle/>
           <a:p>
-            <a:pPr indent="0" marL="0">
+            <a:pPr marL="0" indent="0">
               <a:buNone/>
             </a:pPr>
             <a:r>
@@ -9761,9 +9646,6 @@
               </a:rPr>
               <a:t>Key concepts: </a:t>
             </a:r>
-            <a:pPr indent="0" marL="0">
-              <a:buNone/>
-            </a:pPr>
             <a:r>
               <a:rPr lang="en-US" sz="1100" b="1" dirty="0">
                 <a:solidFill>
@@ -9775,9 +9657,6 @@
               </a:rPr>
               <a:t>submit event</a:t>
             </a:r>
-            <a:pPr indent="0" marL="0">
-              <a:buNone/>
-            </a:pPr>
             <a:r>
               <a:rPr lang="en-US" sz="1100" dirty="0">
                 <a:solidFill>
@@ -9789,9 +9668,6 @@
               </a:rPr>
               <a:t> fires when form is submitted  |  </a:t>
             </a:r>
-            <a:pPr indent="0" marL="0">
-              <a:buNone/>
-            </a:pPr>
             <a:r>
               <a:rPr lang="en-US" sz="1100" b="1" dirty="0">
                 <a:solidFill>
@@ -9803,9 +9679,6 @@
               </a:rPr>
               <a:t>preventDefault()</a:t>
             </a:r>
-            <a:pPr indent="0" marL="0">
-              <a:buNone/>
-            </a:pPr>
             <a:r>
               <a:rPr lang="en-US" sz="1100" dirty="0">
                 <a:solidFill>
@@ -9842,7 +9715,7 @@
           <a:bodyPr wrap="square" rtlCol="0" anchor="ctr"/>
           <a:lstStyle/>
           <a:p>
-            <a:pPr algn="ctr" indent="0" marL="0">
+            <a:pPr marL="0" indent="0" algn="ctr">
               <a:buNone/>
             </a:pPr>
             <a:r>
@@ -9876,6 +9749,7 @@
         <a:solidFill>
           <a:srgbClr val="1A2540"/>
         </a:solidFill>
+        <a:effectLst/>
       </p:bgPr>
     </p:bg>
     <p:spTree>
@@ -9913,7 +9787,7 @@
           <a:bodyPr wrap="square" rtlCol="0" anchor="ctr"/>
           <a:lstStyle/>
           <a:p>
-            <a:pPr indent="0" marL="0">
+            <a:pPr marL="0" indent="0">
               <a:buNone/>
             </a:pPr>
             <a:r>
@@ -9952,7 +9826,7 @@
           <a:bodyPr wrap="square" lIns="0" tIns="0" rIns="0" bIns="0" rtlCol="0" anchor="ctr"/>
           <a:lstStyle/>
           <a:p>
-            <a:pPr indent="0" marL="0">
+            <a:pPr marL="0" indent="0">
               <a:buNone/>
             </a:pPr>
             <a:r>
@@ -10011,7 +9885,7 @@
           <a:bodyPr wrap="square" lIns="0" tIns="0" rIns="0" bIns="0" rtlCol="0" anchor="t"/>
           <a:lstStyle/>
           <a:p>
-            <a:pPr indent="0" marL="0">
+            <a:pPr marL="0" indent="0">
               <a:buNone/>
             </a:pPr>
             <a:r>
@@ -10028,7 +9902,7 @@
             <a:endParaRPr lang="en-US" sz="850" dirty="0"/>
           </a:p>
           <a:p>
-            <a:pPr indent="0" marL="0">
+            <a:pPr marL="0" indent="0">
               <a:buNone/>
             </a:pPr>
             <a:r>
@@ -10045,7 +9919,7 @@
             <a:endParaRPr lang="en-US" sz="850" dirty="0"/>
           </a:p>
           <a:p>
-            <a:pPr indent="0" marL="0">
+            <a:pPr marL="0" indent="0">
               <a:buNone/>
             </a:pPr>
             <a:r>
@@ -10062,7 +9936,7 @@
             <a:endParaRPr lang="en-US" sz="850" dirty="0"/>
           </a:p>
           <a:p>
-            <a:pPr indent="0" marL="0">
+            <a:pPr marL="0" indent="0">
               <a:buNone/>
             </a:pPr>
             <a:r>
@@ -10079,7 +9953,7 @@
             <a:endParaRPr lang="en-US" sz="850" dirty="0"/>
           </a:p>
           <a:p>
-            <a:pPr indent="0" marL="0">
+            <a:pPr marL="0" indent="0">
               <a:buNone/>
             </a:pPr>
             <a:r>
@@ -10096,7 +9970,7 @@
             <a:endParaRPr lang="en-US" sz="850" dirty="0"/>
           </a:p>
           <a:p>
-            <a:pPr indent="0" marL="0">
+            <a:pPr marL="0" indent="0">
               <a:buNone/>
             </a:pPr>
             <a:r>
@@ -10113,7 +9987,7 @@
             <a:endParaRPr lang="en-US" sz="850" dirty="0"/>
           </a:p>
           <a:p>
-            <a:pPr indent="0" marL="0">
+            <a:pPr marL="0" indent="0">
               <a:buNone/>
             </a:pPr>
             <a:r>
@@ -10130,7 +10004,7 @@
             <a:endParaRPr lang="en-US" sz="850" dirty="0"/>
           </a:p>
           <a:p>
-            <a:pPr indent="0" marL="0">
+            <a:pPr marL="0" indent="0">
               <a:buNone/>
             </a:pPr>
             <a:r>
@@ -10147,7 +10021,7 @@
             <a:endParaRPr lang="en-US" sz="850" dirty="0"/>
           </a:p>
           <a:p>
-            <a:pPr indent="0" marL="0">
+            <a:pPr marL="0" indent="0">
               <a:buNone/>
             </a:pPr>
             <a:r>
@@ -10186,7 +10060,7 @@
           <a:bodyPr wrap="square" lIns="0" tIns="0" rIns="0" bIns="0" rtlCol="0" anchor="ctr"/>
           <a:lstStyle/>
           <a:p>
-            <a:pPr indent="0" marL="0">
+            <a:pPr marL="0" indent="0">
               <a:buNone/>
             </a:pPr>
             <a:r>
@@ -10245,7 +10119,7 @@
           <a:bodyPr wrap="square" lIns="0" tIns="0" rIns="0" bIns="0" rtlCol="0" anchor="t"/>
           <a:lstStyle/>
           <a:p>
-            <a:pPr indent="0" marL="0">
+            <a:pPr marL="0" indent="0">
               <a:buNone/>
             </a:pPr>
             <a:r>
@@ -10262,13 +10136,13 @@
             <a:endParaRPr lang="en-US" sz="850" dirty="0"/>
           </a:p>
           <a:p>
-            <a:pPr indent="0" marL="0">
-              <a:buNone/>
-            </a:pPr>
-            <a:endParaRPr lang="en-US" sz="850" dirty="0"/>
-          </a:p>
-          <a:p>
-            <a:pPr indent="0" marL="0">
+            <a:pPr marL="0" indent="0">
+              <a:buNone/>
+            </a:pPr>
+            <a:endParaRPr lang="en-US" sz="850" dirty="0"/>
+          </a:p>
+          <a:p>
+            <a:pPr marL="0" indent="0">
               <a:buNone/>
             </a:pPr>
             <a:r>
@@ -10285,7 +10159,7 @@
             <a:endParaRPr lang="en-US" sz="850" dirty="0"/>
           </a:p>
           <a:p>
-            <a:pPr indent="0" marL="0">
+            <a:pPr marL="0" indent="0">
               <a:buNone/>
             </a:pPr>
             <a:r>
@@ -10302,7 +10176,7 @@
             <a:endParaRPr lang="en-US" sz="850" dirty="0"/>
           </a:p>
           <a:p>
-            <a:pPr indent="0" marL="0">
+            <a:pPr marL="0" indent="0">
               <a:buNone/>
             </a:pPr>
             <a:r>
@@ -10319,7 +10193,7 @@
             <a:endParaRPr lang="en-US" sz="850" dirty="0"/>
           </a:p>
           <a:p>
-            <a:pPr indent="0" marL="0">
+            <a:pPr marL="0" indent="0">
               <a:buNone/>
             </a:pPr>
             <a:r>
@@ -10336,7 +10210,7 @@
             <a:endParaRPr lang="en-US" sz="850" dirty="0"/>
           </a:p>
           <a:p>
-            <a:pPr indent="0" marL="0">
+            <a:pPr marL="0" indent="0">
               <a:buNone/>
             </a:pPr>
             <a:r>
@@ -10353,7 +10227,7 @@
             <a:endParaRPr lang="en-US" sz="850" dirty="0"/>
           </a:p>
           <a:p>
-            <a:pPr indent="0" marL="0">
+            <a:pPr marL="0" indent="0">
               <a:buNone/>
             </a:pPr>
             <a:r>
@@ -10370,7 +10244,7 @@
             <a:endParaRPr lang="en-US" sz="850" dirty="0"/>
           </a:p>
           <a:p>
-            <a:pPr indent="0" marL="0">
+            <a:pPr marL="0" indent="0">
               <a:buNone/>
             </a:pPr>
             <a:r>
@@ -10387,7 +10261,7 @@
             <a:endParaRPr lang="en-US" sz="850" dirty="0"/>
           </a:p>
           <a:p>
-            <a:pPr indent="0" marL="0">
+            <a:pPr marL="0" indent="0">
               <a:buNone/>
             </a:pPr>
             <a:r>
@@ -10404,7 +10278,7 @@
             <a:endParaRPr lang="en-US" sz="850" dirty="0"/>
           </a:p>
           <a:p>
-            <a:pPr indent="0" marL="0">
+            <a:pPr marL="0" indent="0">
               <a:buNone/>
             </a:pPr>
             <a:r>
@@ -10463,7 +10337,7 @@
           <a:bodyPr wrap="square" lIns="0" tIns="0" rIns="0" bIns="0" rtlCol="0" anchor="t"/>
           <a:lstStyle/>
           <a:p>
-            <a:pPr indent="0" marL="0">
+            <a:pPr marL="0" indent="0">
               <a:buNone/>
             </a:pPr>
             <a:r>
@@ -10477,9 +10351,6 @@
               </a:rPr>
               <a:t>input event</a:t>
             </a:r>
-            <a:pPr indent="0" marL="0">
-              <a:buNone/>
-            </a:pPr>
             <a:r>
               <a:rPr lang="en-US" sz="1100" dirty="0">
                 <a:solidFill>
@@ -10492,9 +10363,6 @@
               <a:t> fires on every keystroke, paste, delete — enabling real-time feedback.
 </a:t>
             </a:r>
-            <a:pPr indent="0" marL="0">
-              <a:buNone/>
-            </a:pPr>
             <a:r>
               <a:rPr lang="en-US" sz="1100" b="1" dirty="0">
                 <a:solidFill>
@@ -10506,9 +10374,6 @@
               </a:rPr>
               <a:t>blur event</a:t>
             </a:r>
-            <a:pPr indent="0" marL="0">
-              <a:buNone/>
-            </a:pPr>
             <a:r>
               <a:rPr lang="en-US" sz="1100" dirty="0">
                 <a:solidFill>
@@ -10520,9 +10385,6 @@
               </a:rPr>
               <a:t> fires when user leaves a field — good for "did they fill it?"   </a:t>
             </a:r>
-            <a:pPr indent="0" marL="0">
-              <a:buNone/>
-            </a:pPr>
             <a:r>
               <a:rPr lang="en-US" sz="1100" b="1" dirty="0">
                 <a:solidFill>
@@ -10534,9 +10396,6 @@
               </a:rPr>
               <a:t>change event</a:t>
             </a:r>
-            <a:pPr indent="0" marL="0">
-              <a:buNone/>
-            </a:pPr>
             <a:r>
               <a:rPr lang="en-US" sz="1100" dirty="0">
                 <a:solidFill>
@@ -10573,7 +10432,7 @@
           <a:bodyPr wrap="square" rtlCol="0" anchor="ctr"/>
           <a:lstStyle/>
           <a:p>
-            <a:pPr algn="ctr" indent="0" marL="0">
+            <a:pPr marL="0" indent="0" algn="ctr">
               <a:buNone/>
             </a:pPr>
             <a:r>
@@ -10607,6 +10466,7 @@
         <a:solidFill>
           <a:srgbClr val="1A2540"/>
         </a:solidFill>
+        <a:effectLst/>
       </p:bgPr>
     </p:bg>
     <p:spTree>
@@ -10644,7 +10504,7 @@
           <a:bodyPr wrap="square" rtlCol="0" anchor="ctr"/>
           <a:lstStyle/>
           <a:p>
-            <a:pPr indent="0" marL="0">
+            <a:pPr marL="0" indent="0">
               <a:buNone/>
             </a:pPr>
             <a:r>
@@ -10683,7 +10543,7 @@
           <a:bodyPr wrap="square" lIns="0" tIns="0" rIns="0" bIns="0" rtlCol="0" anchor="ctr"/>
           <a:lstStyle/>
           <a:p>
-            <a:pPr indent="0" marL="0">
+            <a:pPr marL="0" indent="0">
               <a:buNone/>
             </a:pPr>
             <a:r>
@@ -10742,7 +10602,7 @@
           <a:bodyPr wrap="square" lIns="0" tIns="0" rIns="0" bIns="0" rtlCol="0" anchor="t"/>
           <a:lstStyle/>
           <a:p>
-            <a:pPr indent="0" marL="0">
+            <a:pPr marL="0" indent="0">
               <a:buNone/>
             </a:pPr>
             <a:r>
@@ -10759,7 +10619,7 @@
             <a:endParaRPr lang="en-US" sz="850" dirty="0"/>
           </a:p>
           <a:p>
-            <a:pPr indent="0" marL="0">
+            <a:pPr marL="0" indent="0">
               <a:buNone/>
             </a:pPr>
             <a:r>
@@ -10776,7 +10636,7 @@
             <a:endParaRPr lang="en-US" sz="850" dirty="0"/>
           </a:p>
           <a:p>
-            <a:pPr indent="0" marL="0">
+            <a:pPr marL="0" indent="0">
               <a:buNone/>
             </a:pPr>
             <a:r>
@@ -10793,7 +10653,7 @@
             <a:endParaRPr lang="en-US" sz="850" dirty="0"/>
           </a:p>
           <a:p>
-            <a:pPr indent="0" marL="0">
+            <a:pPr marL="0" indent="0">
               <a:buNone/>
             </a:pPr>
             <a:r>
@@ -10810,7 +10670,7 @@
             <a:endParaRPr lang="en-US" sz="850" dirty="0"/>
           </a:p>
           <a:p>
-            <a:pPr indent="0" marL="0">
+            <a:pPr marL="0" indent="0">
               <a:buNone/>
             </a:pPr>
             <a:r>
@@ -10827,7 +10687,7 @@
             <a:endParaRPr lang="en-US" sz="850" dirty="0"/>
           </a:p>
           <a:p>
-            <a:pPr indent="0" marL="0">
+            <a:pPr marL="0" indent="0">
               <a:buNone/>
             </a:pPr>
             <a:r>
@@ -10866,7 +10726,7 @@
           <a:bodyPr wrap="square" lIns="0" tIns="0" rIns="0" bIns="0" rtlCol="0" anchor="ctr"/>
           <a:lstStyle/>
           <a:p>
-            <a:pPr indent="0" marL="0">
+            <a:pPr marL="0" indent="0">
               <a:buNone/>
             </a:pPr>
             <a:r>
@@ -10925,7 +10785,7 @@
           <a:bodyPr wrap="square" lIns="0" tIns="0" rIns="0" bIns="0" rtlCol="0" anchor="t"/>
           <a:lstStyle/>
           <a:p>
-            <a:pPr indent="0" marL="0">
+            <a:pPr marL="0" indent="0">
               <a:buNone/>
             </a:pPr>
             <a:r>
@@ -10942,7 +10802,7 @@
             <a:endParaRPr lang="en-US" sz="850" dirty="0"/>
           </a:p>
           <a:p>
-            <a:pPr indent="0" marL="0">
+            <a:pPr marL="0" indent="0">
               <a:buNone/>
             </a:pPr>
             <a:r>
@@ -10959,7 +10819,7 @@
             <a:endParaRPr lang="en-US" sz="850" dirty="0"/>
           </a:p>
           <a:p>
-            <a:pPr indent="0" marL="0">
+            <a:pPr marL="0" indent="0">
               <a:buNone/>
             </a:pPr>
             <a:r>
@@ -10976,7 +10836,7 @@
             <a:endParaRPr lang="en-US" sz="850" dirty="0"/>
           </a:p>
           <a:p>
-            <a:pPr indent="0" marL="0">
+            <a:pPr marL="0" indent="0">
               <a:buNone/>
             </a:pPr>
             <a:r>
@@ -10993,7 +10853,7 @@
             <a:endParaRPr lang="en-US" sz="850" dirty="0"/>
           </a:p>
           <a:p>
-            <a:pPr indent="0" marL="0">
+            <a:pPr marL="0" indent="0">
               <a:buNone/>
             </a:pPr>
             <a:r>
@@ -11010,7 +10870,7 @@
             <a:endParaRPr lang="en-US" sz="850" dirty="0"/>
           </a:p>
           <a:p>
-            <a:pPr indent="0" marL="0">
+            <a:pPr marL="0" indent="0">
               <a:buNone/>
             </a:pPr>
             <a:r>
@@ -11027,7 +10887,7 @@
             <a:endParaRPr lang="en-US" sz="850" dirty="0"/>
           </a:p>
           <a:p>
-            <a:pPr indent="0" marL="0">
+            <a:pPr marL="0" indent="0">
               <a:buNone/>
             </a:pPr>
             <a:r>
@@ -11044,13 +10904,13 @@
             <a:endParaRPr lang="en-US" sz="850" dirty="0"/>
           </a:p>
           <a:p>
-            <a:pPr indent="0" marL="0">
-              <a:buNone/>
-            </a:pPr>
-            <a:endParaRPr lang="en-US" sz="850" dirty="0"/>
-          </a:p>
-          <a:p>
-            <a:pPr indent="0" marL="0">
+            <a:pPr marL="0" indent="0">
+              <a:buNone/>
+            </a:pPr>
+            <a:endParaRPr lang="en-US" sz="850" dirty="0"/>
+          </a:p>
+          <a:p>
+            <a:pPr marL="0" indent="0">
               <a:buNone/>
             </a:pPr>
             <a:r>
@@ -11067,7 +10927,7 @@
             <a:endParaRPr lang="en-US" sz="850" dirty="0"/>
           </a:p>
           <a:p>
-            <a:pPr indent="0" marL="0">
+            <a:pPr marL="0" indent="0">
               <a:buNone/>
             </a:pPr>
             <a:r>
@@ -11084,7 +10944,7 @@
             <a:endParaRPr lang="en-US" sz="850" dirty="0"/>
           </a:p>
           <a:p>
-            <a:pPr indent="0" marL="0">
+            <a:pPr marL="0" indent="0">
               <a:buNone/>
             </a:pPr>
             <a:r>
@@ -11101,7 +10961,7 @@
             <a:endParaRPr lang="en-US" sz="850" dirty="0"/>
           </a:p>
           <a:p>
-            <a:pPr indent="0" marL="0">
+            <a:pPr marL="0" indent="0">
               <a:buNone/>
             </a:pPr>
             <a:r>
@@ -11118,7 +10978,7 @@
             <a:endParaRPr lang="en-US" sz="850" dirty="0"/>
           </a:p>
           <a:p>
-            <a:pPr indent="0" marL="0">
+            <a:pPr marL="0" indent="0">
               <a:buNone/>
             </a:pPr>
             <a:r>
@@ -11177,7 +11037,7 @@
           <a:bodyPr wrap="square" lIns="0" tIns="0" rIns="0" bIns="0" rtlCol="0" anchor="ctr"/>
           <a:lstStyle/>
           <a:p>
-            <a:pPr indent="0" marL="0">
+            <a:pPr marL="0" indent="0">
               <a:buNone/>
             </a:pPr>
             <a:r>
@@ -11191,9 +11051,6 @@
               </a:rPr>
               <a:t>valueMissing</a:t>
             </a:r>
-            <a:pPr indent="0" marL="0">
-              <a:buNone/>
-            </a:pPr>
             <a:r>
               <a:rPr lang="en-US" sz="1000" dirty="0">
                 <a:solidFill>
@@ -11230,7 +11087,7 @@
           <a:bodyPr wrap="square" lIns="0" tIns="0" rIns="0" bIns="0" rtlCol="0" anchor="ctr"/>
           <a:lstStyle/>
           <a:p>
-            <a:pPr indent="0" marL="0">
+            <a:pPr marL="0" indent="0">
               <a:buNone/>
             </a:pPr>
             <a:r>
@@ -11244,9 +11101,6 @@
               </a:rPr>
               <a:t>typeMismatch</a:t>
             </a:r>
-            <a:pPr indent="0" marL="0">
-              <a:buNone/>
-            </a:pPr>
             <a:r>
               <a:rPr lang="en-US" sz="1000" dirty="0">
                 <a:solidFill>
@@ -11283,7 +11137,7 @@
           <a:bodyPr wrap="square" lIns="0" tIns="0" rIns="0" bIns="0" rtlCol="0" anchor="ctr"/>
           <a:lstStyle/>
           <a:p>
-            <a:pPr indent="0" marL="0">
+            <a:pPr marL="0" indent="0">
               <a:buNone/>
             </a:pPr>
             <a:r>
@@ -11297,9 +11151,6 @@
               </a:rPr>
               <a:t>tooShort</a:t>
             </a:r>
-            <a:pPr indent="0" marL="0">
-              <a:buNone/>
-            </a:pPr>
             <a:r>
               <a:rPr lang="en-US" sz="1000" dirty="0">
                 <a:solidFill>
@@ -11336,7 +11187,7 @@
           <a:bodyPr wrap="square" lIns="0" tIns="0" rIns="0" bIns="0" rtlCol="0" anchor="ctr"/>
           <a:lstStyle/>
           <a:p>
-            <a:pPr indent="0" marL="0">
+            <a:pPr marL="0" indent="0">
               <a:buNone/>
             </a:pPr>
             <a:r>
@@ -11350,9 +11201,6 @@
               </a:rPr>
               <a:t>patternMismatch</a:t>
             </a:r>
-            <a:pPr indent="0" marL="0">
-              <a:buNone/>
-            </a:pPr>
             <a:r>
               <a:rPr lang="en-US" sz="1000" dirty="0">
                 <a:solidFill>
@@ -11389,7 +11237,7 @@
           <a:bodyPr wrap="square" lIns="0" tIns="0" rIns="0" bIns="0" rtlCol="0" anchor="ctr"/>
           <a:lstStyle/>
           <a:p>
-            <a:pPr indent="0" marL="0">
+            <a:pPr marL="0" indent="0">
               <a:buNone/>
             </a:pPr>
             <a:r>
@@ -11403,9 +11251,6 @@
               </a:rPr>
               <a:t>rangeUnderflow</a:t>
             </a:r>
-            <a:pPr indent="0" marL="0">
-              <a:buNone/>
-            </a:pPr>
             <a:r>
               <a:rPr lang="en-US" sz="1000" dirty="0">
                 <a:solidFill>
@@ -11442,7 +11287,7 @@
           <a:bodyPr wrap="square" rtlCol="0" anchor="ctr"/>
           <a:lstStyle/>
           <a:p>
-            <a:pPr algn="ctr" indent="0" marL="0">
+            <a:pPr marL="0" indent="0" algn="ctr">
               <a:buNone/>
             </a:pPr>
             <a:r>
@@ -11476,6 +11321,7 @@
         <a:solidFill>
           <a:srgbClr val="0D1321"/>
         </a:solidFill>
+        <a:effectLst/>
       </p:bgPr>
     </p:bg>
     <p:spTree>
@@ -11513,7 +11359,7 @@
           <a:bodyPr wrap="square" rtlCol="0" anchor="ctr"/>
           <a:lstStyle/>
           <a:p>
-            <a:pPr algn="ctr" indent="0" marL="0">
+            <a:pPr marL="0" indent="0" algn="ctr">
               <a:buNone/>
             </a:pPr>
             <a:r>
@@ -11552,7 +11398,7 @@
           <a:bodyPr wrap="square" rtlCol="0" anchor="ctr"/>
           <a:lstStyle/>
           <a:p>
-            <a:pPr algn="ctr" indent="0" marL="0">
+            <a:pPr marL="0" indent="0" algn="ctr">
               <a:buNone/>
             </a:pPr>
             <a:r>
@@ -11616,7 +11462,7 @@
           <a:bodyPr wrap="square" lIns="0" tIns="0" rIns="0" bIns="0" rtlCol="0" anchor="ctr"/>
           <a:lstStyle/>
           <a:p>
-            <a:pPr indent="0" marL="0">
+            <a:pPr marL="0" indent="0">
               <a:buNone/>
             </a:pPr>
             <a:r>
@@ -11680,7 +11526,7 @@
           <a:bodyPr wrap="square" lIns="0" tIns="0" rIns="0" bIns="0" rtlCol="0" anchor="ctr"/>
           <a:lstStyle/>
           <a:p>
-            <a:pPr indent="0" marL="0">
+            <a:pPr marL="0" indent="0">
               <a:buNone/>
             </a:pPr>
             <a:r>
@@ -11744,7 +11590,7 @@
           <a:bodyPr wrap="square" lIns="0" tIns="0" rIns="0" bIns="0" rtlCol="0" anchor="ctr"/>
           <a:lstStyle/>
           <a:p>
-            <a:pPr indent="0" marL="0">
+            <a:pPr marL="0" indent="0">
               <a:buNone/>
             </a:pPr>
             <a:r>
@@ -11808,7 +11654,7 @@
           <a:bodyPr wrap="square" lIns="0" tIns="0" rIns="0" bIns="0" rtlCol="0" anchor="ctr"/>
           <a:lstStyle/>
           <a:p>
-            <a:pPr indent="0" marL="0">
+            <a:pPr marL="0" indent="0">
               <a:buNone/>
             </a:pPr>
             <a:r>
@@ -11847,7 +11693,7 @@
           <a:bodyPr wrap="square" rtlCol="0" anchor="ctr"/>
           <a:lstStyle/>
           <a:p>
-            <a:pPr algn="ctr" indent="0" marL="0">
+            <a:pPr marL="0" indent="0" algn="ctr">
               <a:buNone/>
             </a:pPr>
             <a:r>
@@ -11881,6 +11727,7 @@
         <a:solidFill>
           <a:srgbClr val="0D1321"/>
         </a:solidFill>
+        <a:effectLst/>
       </p:bgPr>
     </p:bg>
     <p:spTree>
@@ -11918,7 +11765,7 @@
           <a:bodyPr wrap="square" rtlCol="0" anchor="ctr"/>
           <a:lstStyle/>
           <a:p>
-            <a:pPr algn="ctr" indent="0" marL="0">
+            <a:pPr marL="0" indent="0" algn="ctr">
               <a:buNone/>
             </a:pPr>
             <a:r>
@@ -11957,7 +11804,7 @@
           <a:bodyPr wrap="square" rtlCol="0" anchor="ctr"/>
           <a:lstStyle/>
           <a:p>
-            <a:pPr algn="ctr" indent="0" marL="0">
+            <a:pPr marL="0" indent="0" algn="ctr">
               <a:buNone/>
             </a:pPr>
             <a:r>
@@ -12021,7 +11868,7 @@
           <a:bodyPr wrap="square" lIns="0" tIns="0" rIns="0" bIns="0" rtlCol="0" anchor="ctr"/>
           <a:lstStyle/>
           <a:p>
-            <a:pPr indent="0" marL="0">
+            <a:pPr marL="0" indent="0">
               <a:buNone/>
             </a:pPr>
             <a:r>
@@ -12085,7 +11932,7 @@
           <a:bodyPr wrap="square" lIns="0" tIns="0" rIns="0" bIns="0" rtlCol="0" anchor="ctr"/>
           <a:lstStyle/>
           <a:p>
-            <a:pPr indent="0" marL="0">
+            <a:pPr marL="0" indent="0">
               <a:buNone/>
             </a:pPr>
             <a:r>
@@ -12149,7 +11996,7 @@
           <a:bodyPr wrap="square" lIns="0" tIns="0" rIns="0" bIns="0" rtlCol="0" anchor="ctr"/>
           <a:lstStyle/>
           <a:p>
-            <a:pPr indent="0" marL="0">
+            <a:pPr marL="0" indent="0">
               <a:buNone/>
             </a:pPr>
             <a:r>
@@ -12213,7 +12060,7 @@
           <a:bodyPr wrap="square" lIns="0" tIns="0" rIns="0" bIns="0" rtlCol="0" anchor="ctr"/>
           <a:lstStyle/>
           <a:p>
-            <a:pPr indent="0" marL="0">
+            <a:pPr marL="0" indent="0">
               <a:buNone/>
             </a:pPr>
             <a:r>
@@ -12272,7 +12119,7 @@
           <a:bodyPr wrap="square" lIns="0" tIns="0" rIns="0" bIns="0" rtlCol="0" anchor="t"/>
           <a:lstStyle/>
           <a:p>
-            <a:pPr indent="0" marL="0">
+            <a:pPr marL="0" indent="0">
               <a:buNone/>
             </a:pPr>
             <a:r>
@@ -12306,6 +12153,7 @@
         <a:solidFill>
           <a:srgbClr val="1A2540"/>
         </a:solidFill>
+        <a:effectLst/>
       </p:bgPr>
     </p:bg>
     <p:spTree>
@@ -12343,7 +12191,7 @@
           <a:bodyPr wrap="square" rtlCol="0" anchor="ctr"/>
           <a:lstStyle/>
           <a:p>
-            <a:pPr indent="0" marL="0">
+            <a:pPr marL="0" indent="0">
               <a:buNone/>
             </a:pPr>
             <a:r>
@@ -12382,7 +12230,7 @@
           <a:bodyPr wrap="square" lIns="0" tIns="0" rIns="0" bIns="0" rtlCol="0" anchor="ctr"/>
           <a:lstStyle/>
           <a:p>
-            <a:pPr indent="0" marL="0">
+            <a:pPr marL="0" indent="0">
               <a:buNone/>
             </a:pPr>
             <a:r>
@@ -12441,7 +12289,7 @@
           <a:bodyPr wrap="square" lIns="0" tIns="0" rIns="0" bIns="0" rtlCol="0" anchor="t"/>
           <a:lstStyle/>
           <a:p>
-            <a:pPr indent="0" marL="0">
+            <a:pPr marL="0" indent="0">
               <a:buNone/>
             </a:pPr>
             <a:r>
@@ -12458,7 +12306,7 @@
             <a:endParaRPr lang="en-US" sz="850" dirty="0"/>
           </a:p>
           <a:p>
-            <a:pPr indent="0" marL="0">
+            <a:pPr marL="0" indent="0">
               <a:buNone/>
             </a:pPr>
             <a:r>
@@ -12475,7 +12323,7 @@
             <a:endParaRPr lang="en-US" sz="850" dirty="0"/>
           </a:p>
           <a:p>
-            <a:pPr indent="0" marL="0">
+            <a:pPr marL="0" indent="0">
               <a:buNone/>
             </a:pPr>
             <a:r>
@@ -12492,7 +12340,7 @@
             <a:endParaRPr lang="en-US" sz="850" dirty="0"/>
           </a:p>
           <a:p>
-            <a:pPr indent="0" marL="0">
+            <a:pPr marL="0" indent="0">
               <a:buNone/>
             </a:pPr>
             <a:r>
@@ -12509,7 +12357,7 @@
             <a:endParaRPr lang="en-US" sz="850" dirty="0"/>
           </a:p>
           <a:p>
-            <a:pPr indent="0" marL="0">
+            <a:pPr marL="0" indent="0">
               <a:buNone/>
             </a:pPr>
             <a:r>
@@ -12526,7 +12374,7 @@
             <a:endParaRPr lang="en-US" sz="850" dirty="0"/>
           </a:p>
           <a:p>
-            <a:pPr indent="0" marL="0">
+            <a:pPr marL="0" indent="0">
               <a:buNone/>
             </a:pPr>
             <a:r>
@@ -12543,7 +12391,7 @@
             <a:endParaRPr lang="en-US" sz="850" dirty="0"/>
           </a:p>
           <a:p>
-            <a:pPr indent="0" marL="0">
+            <a:pPr marL="0" indent="0">
               <a:buNone/>
             </a:pPr>
             <a:r>
@@ -12582,7 +12430,7 @@
           <a:bodyPr wrap="square" lIns="0" tIns="0" rIns="0" bIns="0" rtlCol="0" anchor="ctr"/>
           <a:lstStyle/>
           <a:p>
-            <a:pPr indent="0" marL="0">
+            <a:pPr marL="0" indent="0">
               <a:buNone/>
             </a:pPr>
             <a:r>
@@ -12641,7 +12489,7 @@
           <a:bodyPr wrap="square" lIns="0" tIns="0" rIns="0" bIns="0" rtlCol="0" anchor="t"/>
           <a:lstStyle/>
           <a:p>
-            <a:pPr indent="0" marL="0">
+            <a:pPr marL="0" indent="0">
               <a:buNone/>
             </a:pPr>
             <a:r>
@@ -12658,7 +12506,7 @@
             <a:endParaRPr lang="en-US" sz="850" dirty="0"/>
           </a:p>
           <a:p>
-            <a:pPr indent="0" marL="0">
+            <a:pPr marL="0" indent="0">
               <a:buNone/>
             </a:pPr>
             <a:r>
@@ -12675,7 +12523,7 @@
             <a:endParaRPr lang="en-US" sz="850" dirty="0"/>
           </a:p>
           <a:p>
-            <a:pPr indent="0" marL="0">
+            <a:pPr marL="0" indent="0">
               <a:buNone/>
             </a:pPr>
             <a:r>
@@ -12692,7 +12540,7 @@
             <a:endParaRPr lang="en-US" sz="850" dirty="0"/>
           </a:p>
           <a:p>
-            <a:pPr indent="0" marL="0">
+            <a:pPr marL="0" indent="0">
               <a:buNone/>
             </a:pPr>
             <a:r>
@@ -12709,7 +12557,7 @@
             <a:endParaRPr lang="en-US" sz="850" dirty="0"/>
           </a:p>
           <a:p>
-            <a:pPr indent="0" marL="0">
+            <a:pPr marL="0" indent="0">
               <a:buNone/>
             </a:pPr>
             <a:r>
@@ -12726,7 +12574,7 @@
             <a:endParaRPr lang="en-US" sz="850" dirty="0"/>
           </a:p>
           <a:p>
-            <a:pPr indent="0" marL="0">
+            <a:pPr marL="0" indent="0">
               <a:buNone/>
             </a:pPr>
             <a:r>
@@ -12743,7 +12591,7 @@
             <a:endParaRPr lang="en-US" sz="850" dirty="0"/>
           </a:p>
           <a:p>
-            <a:pPr indent="0" marL="0">
+            <a:pPr marL="0" indent="0">
               <a:buNone/>
             </a:pPr>
             <a:r>
@@ -12782,7 +12630,7 @@
           <a:bodyPr wrap="square" lIns="0" tIns="0" rIns="0" bIns="0" rtlCol="0" anchor="ctr"/>
           <a:lstStyle/>
           <a:p>
-            <a:pPr indent="0" marL="0">
+            <a:pPr marL="0" indent="0">
               <a:buNone/>
             </a:pPr>
             <a:r>
@@ -12841,7 +12689,7 @@
           <a:bodyPr wrap="square" lIns="0" tIns="0" rIns="0" bIns="0" rtlCol="0" anchor="t"/>
           <a:lstStyle/>
           <a:p>
-            <a:pPr indent="0" marL="0">
+            <a:pPr marL="0" indent="0">
               <a:buNone/>
             </a:pPr>
             <a:r>
@@ -12858,7 +12706,7 @@
             <a:endParaRPr lang="en-US" sz="850" dirty="0"/>
           </a:p>
           <a:p>
-            <a:pPr indent="0" marL="0">
+            <a:pPr marL="0" indent="0">
               <a:buNone/>
             </a:pPr>
             <a:r>
@@ -12875,7 +12723,7 @@
             <a:endParaRPr lang="en-US" sz="850" dirty="0"/>
           </a:p>
           <a:p>
-            <a:pPr indent="0" marL="0">
+            <a:pPr marL="0" indent="0">
               <a:buNone/>
             </a:pPr>
             <a:r>
@@ -12892,7 +12740,7 @@
             <a:endParaRPr lang="en-US" sz="850" dirty="0"/>
           </a:p>
           <a:p>
-            <a:pPr indent="0" marL="0">
+            <a:pPr marL="0" indent="0">
               <a:buNone/>
             </a:pPr>
             <a:r>
@@ -12909,7 +12757,7 @@
             <a:endParaRPr lang="en-US" sz="850" dirty="0"/>
           </a:p>
           <a:p>
-            <a:pPr indent="0" marL="0">
+            <a:pPr marL="0" indent="0">
               <a:buNone/>
             </a:pPr>
             <a:r>
@@ -12926,7 +12774,7 @@
             <a:endParaRPr lang="en-US" sz="850" dirty="0"/>
           </a:p>
           <a:p>
-            <a:pPr indent="0" marL="0">
+            <a:pPr marL="0" indent="0">
               <a:buNone/>
             </a:pPr>
             <a:r>
@@ -12985,7 +12833,7 @@
           <a:bodyPr wrap="square" lIns="0" tIns="0" rIns="0" bIns="0" rtlCol="0" anchor="ctr"/>
           <a:lstStyle/>
           <a:p>
-            <a:pPr indent="0" marL="0">
+            <a:pPr marL="0" indent="0">
               <a:buNone/>
             </a:pPr>
             <a:r>
@@ -12999,9 +12847,6 @@
               </a:rPr>
               <a:t>aria-describedby  </a:t>
             </a:r>
-            <a:pPr indent="0" marL="0">
-              <a:buNone/>
-            </a:pPr>
             <a:r>
               <a:rPr lang="en-US" sz="1000" dirty="0">
                 <a:solidFill>
@@ -13038,7 +12883,7 @@
           <a:bodyPr wrap="square" lIns="0" tIns="0" rIns="0" bIns="0" rtlCol="0" anchor="ctr"/>
           <a:lstStyle/>
           <a:p>
-            <a:pPr indent="0" marL="0">
+            <a:pPr marL="0" indent="0">
               <a:buNone/>
             </a:pPr>
             <a:r>
@@ -13052,9 +12897,6 @@
               </a:rPr>
               <a:t>aria-invalid="true"  </a:t>
             </a:r>
-            <a:pPr indent="0" marL="0">
-              <a:buNone/>
-            </a:pPr>
             <a:r>
               <a:rPr lang="en-US" sz="1000" dirty="0">
                 <a:solidFill>
@@ -13091,7 +12933,7 @@
           <a:bodyPr wrap="square" lIns="0" tIns="0" rIns="0" bIns="0" rtlCol="0" anchor="ctr"/>
           <a:lstStyle/>
           <a:p>
-            <a:pPr indent="0" marL="0">
+            <a:pPr marL="0" indent="0">
               <a:buNone/>
             </a:pPr>
             <a:r>
@@ -13105,9 +12947,6 @@
               </a:rPr>
               <a:t>role="alert"  </a:t>
             </a:r>
-            <a:pPr indent="0" marL="0">
-              <a:buNone/>
-            </a:pPr>
             <a:r>
               <a:rPr lang="en-US" sz="1000" dirty="0">
                 <a:solidFill>
@@ -13144,7 +12983,7 @@
           <a:bodyPr wrap="square" rtlCol="0" anchor="ctr"/>
           <a:lstStyle/>
           <a:p>
-            <a:pPr algn="ctr" indent="0" marL="0">
+            <a:pPr marL="0" indent="0" algn="ctr">
               <a:buNone/>
             </a:pPr>
             <a:r>
@@ -13463,4 +13302,319 @@
     </a:ext>
   </a:extLst>
 </a:theme>
+</file>
+
+<file path=ppt/theme/theme2.xml><?xml version="1.0" encoding="utf-8"?>
+<a:theme xmlns:a="http://schemas.openxmlformats.org/drawingml/2006/main" name="Office Theme">
+  <a:themeElements>
+    <a:clrScheme name="Office">
+      <a:dk1>
+        <a:sysClr val="windowText" lastClr="000000"/>
+      </a:dk1>
+      <a:lt1>
+        <a:sysClr val="window" lastClr="FFFFFF"/>
+      </a:lt1>
+      <a:dk2>
+        <a:srgbClr val="0E2841"/>
+      </a:dk2>
+      <a:lt2>
+        <a:srgbClr val="E8E8E8"/>
+      </a:lt2>
+      <a:accent1>
+        <a:srgbClr val="156082"/>
+      </a:accent1>
+      <a:accent2>
+        <a:srgbClr val="E97132"/>
+      </a:accent2>
+      <a:accent3>
+        <a:srgbClr val="196B24"/>
+      </a:accent3>
+      <a:accent4>
+        <a:srgbClr val="0F9ED5"/>
+      </a:accent4>
+      <a:accent5>
+        <a:srgbClr val="A02B93"/>
+      </a:accent5>
+      <a:accent6>
+        <a:srgbClr val="4EA72E"/>
+      </a:accent6>
+      <a:hlink>
+        <a:srgbClr val="467886"/>
+      </a:hlink>
+      <a:folHlink>
+        <a:srgbClr val="96607D"/>
+      </a:folHlink>
+    </a:clrScheme>
+    <a:fontScheme name="Office">
+      <a:majorFont>
+        <a:latin typeface="맑은 고딕" panose="02110004020202020204"/>
+        <a:ea typeface=""/>
+        <a:cs typeface=""/>
+        <a:font script="Jpan" typeface="游ゴシック Light"/>
+        <a:font script="Hang" typeface="맑은 고딕"/>
+        <a:font script="Hans" typeface="等线 Light"/>
+        <a:font script="Hant" typeface="新細明體"/>
+        <a:font script="Arab" typeface="Times New Roman"/>
+        <a:font script="Hebr" typeface="Times New Roman"/>
+        <a:font script="Thai" typeface="Angsana New"/>
+        <a:font script="Ethi" typeface="Nyala"/>
+        <a:font script="Beng" typeface="Vrinda"/>
+        <a:font script="Gujr" typeface="Shruti"/>
+        <a:font script="Khmr" typeface="MoolBoran"/>
+        <a:font script="Knda" typeface="Tunga"/>
+        <a:font script="Guru" typeface="Raavi"/>
+        <a:font script="Cans" typeface="Euphemia"/>
+        <a:font script="Cher" typeface="Plantagenet Cherokee"/>
+        <a:font script="Yiii" typeface="Microsoft Yi Baiti"/>
+        <a:font script="Tibt" typeface="Microsoft Himalaya"/>
+        <a:font script="Thaa" typeface="MV Boli"/>
+        <a:font script="Deva" typeface="Mangal"/>
+        <a:font script="Telu" typeface="Gautami"/>
+        <a:font script="Taml" typeface="Latha"/>
+        <a:font script="Syrc" typeface="Estrangelo Edessa"/>
+        <a:font script="Orya" typeface="Kalinga"/>
+        <a:font script="Mlym" typeface="Kartika"/>
+        <a:font script="Laoo" typeface="DokChampa"/>
+        <a:font script="Sinh" typeface="Iskoola Pota"/>
+        <a:font script="Mong" typeface="Mongolian Baiti"/>
+        <a:font script="Viet" typeface="Times New Roman"/>
+        <a:font script="Uigh" typeface="Microsoft Uighur"/>
+        <a:font script="Geor" typeface="Sylfaen"/>
+        <a:font script="Armn" typeface="Arial"/>
+        <a:font script="Bugi" typeface="Leelawadee UI"/>
+        <a:font script="Bopo" typeface="Microsoft JhengHei"/>
+        <a:font script="Java" typeface="Javanese Text"/>
+        <a:font script="Lisu" typeface="Segoe UI"/>
+        <a:font script="Mymr" typeface="Myanmar Text"/>
+        <a:font script="Nkoo" typeface="Ebrima"/>
+        <a:font script="Olck" typeface="Nirmala UI"/>
+        <a:font script="Osma" typeface="Ebrima"/>
+        <a:font script="Phag" typeface="Phagspa"/>
+        <a:font script="Syrn" typeface="Estrangelo Edessa"/>
+        <a:font script="Syrj" typeface="Estrangelo Edessa"/>
+        <a:font script="Syre" typeface="Estrangelo Edessa"/>
+        <a:font script="Sora" typeface="Nirmala UI"/>
+        <a:font script="Tale" typeface="Microsoft Tai Le"/>
+        <a:font script="Talu" typeface="Microsoft New Tai Lue"/>
+        <a:font script="Tfng" typeface="Ebrima"/>
+      </a:majorFont>
+      <a:minorFont>
+        <a:latin typeface="맑은 고딕" panose="02110004020202020204"/>
+        <a:ea typeface=""/>
+        <a:cs typeface=""/>
+        <a:font script="Jpan" typeface="游ゴシック"/>
+        <a:font script="Hang" typeface="맑은 고딕"/>
+        <a:font script="Hans" typeface="等线"/>
+        <a:font script="Hant" typeface="新細明體"/>
+        <a:font script="Arab" typeface="Arial"/>
+        <a:font script="Hebr" typeface="Arial"/>
+        <a:font script="Thai" typeface="Cordia New"/>
+        <a:font script="Ethi" typeface="Nyala"/>
+        <a:font script="Beng" typeface="Vrinda"/>
+        <a:font script="Gujr" typeface="Shruti"/>
+        <a:font script="Khmr" typeface="DaunPenh"/>
+        <a:font script="Knda" typeface="Tunga"/>
+        <a:font script="Guru" typeface="Raavi"/>
+        <a:font script="Cans" typeface="Euphemia"/>
+        <a:font script="Cher" typeface="Plantagenet Cherokee"/>
+        <a:font script="Yiii" typeface="Microsoft Yi Baiti"/>
+        <a:font script="Tibt" typeface="Microsoft Himalaya"/>
+        <a:font script="Thaa" typeface="MV Boli"/>
+        <a:font script="Deva" typeface="Mangal"/>
+        <a:font script="Telu" typeface="Gautami"/>
+        <a:font script="Taml" typeface="Latha"/>
+        <a:font script="Syrc" typeface="Estrangelo Edessa"/>
+        <a:font script="Orya" typeface="Kalinga"/>
+        <a:font script="Mlym" typeface="Kartika"/>
+        <a:font script="Laoo" typeface="DokChampa"/>
+        <a:font script="Sinh" typeface="Iskoola Pota"/>
+        <a:font script="Mong" typeface="Mongolian Baiti"/>
+        <a:font script="Viet" typeface="Arial"/>
+        <a:font script="Uigh" typeface="Microsoft Uighur"/>
+        <a:font script="Geor" typeface="Sylfaen"/>
+        <a:font script="Armn" typeface="Arial"/>
+        <a:font script="Bugi" typeface="Leelawadee UI"/>
+        <a:font script="Bopo" typeface="Microsoft JhengHei"/>
+        <a:font script="Java" typeface="Javanese Text"/>
+        <a:font script="Lisu" typeface="Segoe UI"/>
+        <a:font script="Mymr" typeface="Myanmar Text"/>
+        <a:font script="Nkoo" typeface="Ebrima"/>
+        <a:font script="Olck" typeface="Nirmala UI"/>
+        <a:font script="Osma" typeface="Ebrima"/>
+        <a:font script="Phag" typeface="Phagspa"/>
+        <a:font script="Syrn" typeface="Estrangelo Edessa"/>
+        <a:font script="Syrj" typeface="Estrangelo Edessa"/>
+        <a:font script="Syre" typeface="Estrangelo Edessa"/>
+        <a:font script="Sora" typeface="Nirmala UI"/>
+        <a:font script="Tale" typeface="Microsoft Tai Le"/>
+        <a:font script="Talu" typeface="Microsoft New Tai Lue"/>
+        <a:font script="Tfng" typeface="Ebrima"/>
+      </a:minorFont>
+    </a:fontScheme>
+    <a:fmtScheme name="Office">
+      <a:fillStyleLst>
+        <a:solidFill>
+          <a:schemeClr val="phClr"/>
+        </a:solidFill>
+        <a:gradFill rotWithShape="1">
+          <a:gsLst>
+            <a:gs pos="0">
+              <a:schemeClr val="phClr">
+                <a:lumMod val="110000"/>
+                <a:satMod val="105000"/>
+                <a:tint val="67000"/>
+              </a:schemeClr>
+            </a:gs>
+            <a:gs pos="50000">
+              <a:schemeClr val="phClr">
+                <a:lumMod val="105000"/>
+                <a:satMod val="103000"/>
+                <a:tint val="73000"/>
+              </a:schemeClr>
+            </a:gs>
+            <a:gs pos="100000">
+              <a:schemeClr val="phClr">
+                <a:lumMod val="105000"/>
+                <a:satMod val="109000"/>
+                <a:tint val="81000"/>
+              </a:schemeClr>
+            </a:gs>
+          </a:gsLst>
+          <a:lin ang="5400000" scaled="0"/>
+        </a:gradFill>
+        <a:gradFill rotWithShape="1">
+          <a:gsLst>
+            <a:gs pos="0">
+              <a:schemeClr val="phClr">
+                <a:satMod val="103000"/>
+                <a:lumMod val="102000"/>
+                <a:tint val="94000"/>
+              </a:schemeClr>
+            </a:gs>
+            <a:gs pos="50000">
+              <a:schemeClr val="phClr">
+                <a:satMod val="110000"/>
+                <a:lumMod val="100000"/>
+                <a:shade val="100000"/>
+              </a:schemeClr>
+            </a:gs>
+            <a:gs pos="100000">
+              <a:schemeClr val="phClr">
+                <a:lumMod val="99000"/>
+                <a:satMod val="120000"/>
+                <a:shade val="78000"/>
+              </a:schemeClr>
+            </a:gs>
+          </a:gsLst>
+          <a:lin ang="5400000" scaled="0"/>
+        </a:gradFill>
+      </a:fillStyleLst>
+      <a:lnStyleLst>
+        <a:ln w="12700" cap="flat" cmpd="sng" algn="ctr">
+          <a:solidFill>
+            <a:schemeClr val="phClr"/>
+          </a:solidFill>
+          <a:prstDash val="solid"/>
+          <a:miter lim="800000"/>
+        </a:ln>
+        <a:ln w="19050" cap="flat" cmpd="sng" algn="ctr">
+          <a:solidFill>
+            <a:schemeClr val="phClr"/>
+          </a:solidFill>
+          <a:prstDash val="solid"/>
+          <a:miter lim="800000"/>
+        </a:ln>
+        <a:ln w="25400" cap="flat" cmpd="sng" algn="ctr">
+          <a:solidFill>
+            <a:schemeClr val="phClr"/>
+          </a:solidFill>
+          <a:prstDash val="solid"/>
+          <a:miter lim="800000"/>
+        </a:ln>
+      </a:lnStyleLst>
+      <a:effectStyleLst>
+        <a:effectStyle>
+          <a:effectLst/>
+        </a:effectStyle>
+        <a:effectStyle>
+          <a:effectLst/>
+        </a:effectStyle>
+        <a:effectStyle>
+          <a:effectLst>
+            <a:outerShdw blurRad="57150" dist="19050" dir="5400000" algn="ctr" rotWithShape="0">
+              <a:srgbClr val="000000">
+                <a:alpha val="63000"/>
+              </a:srgbClr>
+            </a:outerShdw>
+          </a:effectLst>
+        </a:effectStyle>
+      </a:effectStyleLst>
+      <a:bgFillStyleLst>
+        <a:solidFill>
+          <a:schemeClr val="phClr"/>
+        </a:solidFill>
+        <a:solidFill>
+          <a:schemeClr val="phClr">
+            <a:tint val="95000"/>
+            <a:satMod val="170000"/>
+          </a:schemeClr>
+        </a:solidFill>
+        <a:gradFill rotWithShape="1">
+          <a:gsLst>
+            <a:gs pos="0">
+              <a:schemeClr val="phClr">
+                <a:tint val="93000"/>
+                <a:satMod val="150000"/>
+                <a:shade val="98000"/>
+                <a:lumMod val="102000"/>
+              </a:schemeClr>
+            </a:gs>
+            <a:gs pos="50000">
+              <a:schemeClr val="phClr">
+                <a:tint val="98000"/>
+                <a:satMod val="130000"/>
+                <a:shade val="90000"/>
+                <a:lumMod val="103000"/>
+              </a:schemeClr>
+            </a:gs>
+            <a:gs pos="100000">
+              <a:schemeClr val="phClr">
+                <a:shade val="63000"/>
+                <a:satMod val="120000"/>
+              </a:schemeClr>
+            </a:gs>
+          </a:gsLst>
+          <a:lin ang="5400000" scaled="0"/>
+        </a:gradFill>
+      </a:bgFillStyleLst>
+    </a:fmtScheme>
+  </a:themeElements>
+  <a:objectDefaults>
+    <a:lnDef>
+      <a:spPr/>
+      <a:bodyPr/>
+      <a:lstStyle/>
+      <a:style>
+        <a:lnRef idx="2">
+          <a:schemeClr val="accent1"/>
+        </a:lnRef>
+        <a:fillRef idx="0">
+          <a:schemeClr val="accent1"/>
+        </a:fillRef>
+        <a:effectRef idx="1">
+          <a:schemeClr val="accent1"/>
+        </a:effectRef>
+        <a:fontRef idx="minor">
+          <a:schemeClr val="tx1"/>
+        </a:fontRef>
+      </a:style>
+    </a:lnDef>
+  </a:objectDefaults>
+  <a:extraClrSchemeLst/>
+  <a:extLst>
+    <a:ext uri="{05A4C25C-085E-4340-85A3-A5531E510DB2}">
+      <thm15:themeFamily xmlns:thm15="http://schemas.microsoft.com/office/thememl/2012/main" name="Office Theme" id="{2E142A2C-CD16-42D6-873A-C26D2A0506FA}" vid="{1BDDFF52-6CD6-40A5-AB3C-68EB2F1E4D0A}"/>
+    </a:ext>
+  </a:extLst>
+</a:theme>
 </file>